--- a/Portofolio-Analisis-Pengangguran-2026.pptx
+++ b/Portofolio-Analisis-Pengangguran-2026.pptx
@@ -3093,7 +3093,7 @@
     <p:bg>
       <p:bgPr>
         <a:solidFill>
-          <a:srgbClr val="1E3A8A"/>
+          <a:srgbClr val="EFE7D8"/>
         </a:solidFill>
         <a:effectLst/>
       </p:bgPr>
@@ -3107,14 +3107,154 @@
       <p:grpSpPr/>
       <p:sp>
         <p:nvSpPr>
-          <p:cNvPr id="2" name="TextBox 1"/>
+          <p:cNvPr id="2" name="Rounded Rectangle 1"/>
+          <p:cNvSpPr/>
+          <p:nvPr/>
+        </p:nvSpPr>
+        <p:spPr>
+          <a:xfrm>
+            <a:off x="6967728" y="932688"/>
+            <a:ext cx="4892040" cy="5120640"/>
+          </a:xfrm>
+          <a:prstGeom prst="roundRect">
+            <a:avLst>
+              <a:gd name="adj" fmla="val 4112"/>
+            </a:avLst>
+          </a:prstGeom>
+          <a:solidFill>
+            <a:srgbClr val="EFC3D2"/>
+          </a:solidFill>
+          <a:ln>
+            <a:noFill/>
+          </a:ln>
+          <a:effectLst/>
+        </p:spPr>
+        <p:style>
+          <a:lnRef idx="1">
+            <a:schemeClr val="accent1"/>
+          </a:lnRef>
+          <a:fillRef idx="3">
+            <a:schemeClr val="accent1"/>
+          </a:fillRef>
+          <a:effectRef idx="2">
+            <a:schemeClr val="accent1"/>
+          </a:effectRef>
+          <a:fontRef idx="minor">
+            <a:schemeClr val="lt1"/>
+          </a:fontRef>
+        </p:style>
+        <p:txBody>
+          <a:bodyPr rtlCol="0" anchor="ctr"/>
+          <a:lstStyle/>
+          <a:p>
+            <a:pPr algn="ctr"/>
+          </a:p>
+        </p:txBody>
+      </p:sp>
+      <p:sp>
+        <p:nvSpPr>
+          <p:cNvPr id="3" name="Rounded Rectangle 2"/>
+          <p:cNvSpPr/>
+          <p:nvPr/>
+        </p:nvSpPr>
+        <p:spPr>
+          <a:xfrm>
+            <a:off x="6748272" y="713232"/>
+            <a:ext cx="4892040" cy="5120640"/>
+          </a:xfrm>
+          <a:prstGeom prst="roundRect">
+            <a:avLst>
+              <a:gd name="adj" fmla="val 3364"/>
+            </a:avLst>
+          </a:prstGeom>
+          <a:solidFill>
+            <a:srgbClr val="F7F1E5"/>
+          </a:solidFill>
+          <a:ln w="12700">
+            <a:solidFill>
+              <a:srgbClr val="DED2BA"/>
+            </a:solidFill>
+          </a:ln>
+          <a:effectLst/>
+        </p:spPr>
+        <p:style>
+          <a:lnRef idx="1">
+            <a:schemeClr val="accent1"/>
+          </a:lnRef>
+          <a:fillRef idx="3">
+            <a:schemeClr val="accent1"/>
+          </a:fillRef>
+          <a:effectRef idx="2">
+            <a:schemeClr val="accent1"/>
+          </a:effectRef>
+          <a:fontRef idx="minor">
+            <a:schemeClr val="lt1"/>
+          </a:fontRef>
+        </p:style>
+        <p:txBody>
+          <a:bodyPr rtlCol="0" anchor="ctr"/>
+          <a:lstStyle/>
+          <a:p>
+            <a:pPr algn="ctr"/>
+          </a:p>
+        </p:txBody>
+      </p:sp>
+      <p:sp>
+        <p:nvSpPr>
+          <p:cNvPr id="4" name="Rounded Rectangle 3"/>
+          <p:cNvSpPr/>
+          <p:nvPr/>
+        </p:nvSpPr>
+        <p:spPr>
+          <a:xfrm>
+            <a:off x="6830568" y="795528"/>
+            <a:ext cx="4727448" cy="4956048"/>
+          </a:xfrm>
+          <a:prstGeom prst="roundRect">
+            <a:avLst>
+              <a:gd name="adj" fmla="val 3094"/>
+            </a:avLst>
+          </a:prstGeom>
+          <a:noFill/>
+          <a:ln w="15240">
+            <a:solidFill>
+              <a:srgbClr val="EFC3D2"/>
+            </a:solidFill>
+          </a:ln>
+          <a:effectLst/>
+        </p:spPr>
+        <p:style>
+          <a:lnRef idx="1">
+            <a:schemeClr val="accent1"/>
+          </a:lnRef>
+          <a:fillRef idx="3">
+            <a:schemeClr val="accent1"/>
+          </a:fillRef>
+          <a:effectRef idx="2">
+            <a:schemeClr val="accent1"/>
+          </a:effectRef>
+          <a:fontRef idx="minor">
+            <a:schemeClr val="lt1"/>
+          </a:fontRef>
+        </p:style>
+        <p:txBody>
+          <a:bodyPr rtlCol="0" anchor="ctr"/>
+          <a:lstStyle/>
+          <a:p>
+            <a:pPr algn="ctr"/>
+          </a:p>
+        </p:txBody>
+      </p:sp>
+      <p:sp>
+        <p:nvSpPr>
+          <p:cNvPr id="5" name="TextBox 4"/>
           <p:cNvSpPr txBox="1"/>
           <p:nvPr/>
         </p:nvSpPr>
         <p:spPr>
           <a:xfrm>
-            <a:off x="822960" y="914400"/>
-            <a:ext cx="10515600" cy="1097280"/>
+            <a:off x="7022592" y="1847088"/>
+            <a:ext cx="4343400" cy="1234440"/>
           </a:xfrm>
           <a:prstGeom prst="rect">
             <a:avLst/>
@@ -3122,37 +3262,41 @@
           <a:noFill/>
         </p:spPr>
         <p:txBody>
-          <a:bodyPr wrap="square">
+          <a:bodyPr wrap="square" lIns="0" rIns="0" tIns="0" bIns="0">
             <a:spAutoFit/>
           </a:bodyPr>
           <a:lstStyle/>
           <a:p>
-            <a:pPr>
+            <a:pPr algn="ctr">
+              <a:lnSpc>
+                <a:spcPct val="107000"/>
+              </a:lnSpc>
               <a:spcAft>
                 <a:spcPts val="800"/>
               </a:spcAft>
             </a:pPr>
             <a:r>
-              <a:rPr sz="4000" b="1" i="0">
-                <a:solidFill>
-                  <a:srgbClr val="FFFFFF"/>
-                </a:solidFill>
+              <a:rPr sz="6800" b="1" i="0">
+                <a:solidFill>
+                  <a:srgbClr val="C75B7F"/>
+                </a:solidFill>
+                <a:latin typeface="Noto Sans"/>
               </a:rPr>
-              <a:t>ANALISIS PENGANGGURAN INDONESIA 2026</a:t>
-            </a:r>
-          </a:p>
-        </p:txBody>
-      </p:sp>
-      <p:sp>
-        <p:nvSpPr>
-          <p:cNvPr id="3" name="TextBox 2"/>
+              <a:t>17,37%</a:t>
+            </a:r>
+          </a:p>
+        </p:txBody>
+      </p:sp>
+      <p:sp>
+        <p:nvSpPr>
+          <p:cNvPr id="6" name="TextBox 5"/>
           <p:cNvSpPr txBox="1"/>
           <p:nvPr/>
         </p:nvSpPr>
         <p:spPr>
           <a:xfrm>
-            <a:off x="822960" y="2194560"/>
-            <a:ext cx="10515600" cy="1097280"/>
+            <a:off x="7022592" y="3090672"/>
+            <a:ext cx="4343400" cy="1051560"/>
           </a:xfrm>
           <a:prstGeom prst="rect">
             <a:avLst/>
@@ -3160,90 +3304,190 @@
           <a:noFill/>
         </p:spPr>
         <p:txBody>
-          <a:bodyPr wrap="square">
+          <a:bodyPr wrap="square" lIns="0" rIns="0" tIns="0" bIns="0">
             <a:spAutoFit/>
           </a:bodyPr>
           <a:lstStyle/>
           <a:p>
-            <a:pPr>
+            <a:pPr algn="ctr">
+              <a:lnSpc>
+                <a:spcPct val="107000"/>
+              </a:lnSpc>
               <a:spcAft>
                 <a:spcPts val="800"/>
               </a:spcAft>
             </a:pPr>
             <a:r>
-              <a:rPr sz="2200" b="0" i="0">
-                <a:solidFill>
-                  <a:srgbClr val="FFFFFF"/>
-                </a:solidFill>
+              <a:rPr sz="1500" b="1" i="0">
+                <a:solidFill>
+                  <a:srgbClr val="2E3138"/>
+                </a:solidFill>
+                <a:latin typeface="Noto Sans"/>
               </a:rPr>
-              <a:t>Paradoks Pendidikan: TPT Nasional Turun, tapi Lulusan SMK Paling Sulit Dapat Kerja</a:t>
-            </a:r>
-          </a:p>
-        </p:txBody>
-      </p:sp>
-      <p:sp>
-        <p:nvSpPr>
-          <p:cNvPr id="4" name="TextBox 3"/>
-          <p:cNvSpPr txBox="1"/>
-          <p:nvPr/>
-        </p:nvSpPr>
-        <p:spPr>
-          <a:xfrm>
-            <a:off x="822960" y="3566160"/>
-            <a:ext cx="10515600" cy="1463040"/>
-          </a:xfrm>
-          <a:prstGeom prst="rect">
-            <a:avLst/>
-          </a:prstGeom>
-          <a:noFill/>
-        </p:spPr>
-        <p:txBody>
-          <a:bodyPr wrap="square">
-            <a:spAutoFit/>
-          </a:bodyPr>
-          <a:lstStyle/>
-          <a:p>
-            <a:pPr>
+              <a:t>TPT usia 15-24 tahun (Mei 2026)</a:t>
+            </a:r>
+          </a:p>
+          <a:p>
+            <a:pPr algn="ctr">
+              <a:lnSpc>
+                <a:spcPct val="107000"/>
+              </a:lnSpc>
               <a:spcAft>
                 <a:spcPts val="800"/>
               </a:spcAft>
             </a:pPr>
             <a:r>
-              <a:rPr sz="1600" b="0" i="0">
+              <a:rPr sz="1250" b="0" i="0">
+                <a:solidFill>
+                  <a:srgbClr val="5F5B4F"/>
+                </a:solidFill>
+                <a:latin typeface="Noto Sans"/>
+              </a:rPr>
+              <a:t>Naik 1,01 poin persen dari Feb 2026, saat TPT nasional justru turun.</a:t>
+            </a:r>
+          </a:p>
+        </p:txBody>
+      </p:sp>
+      <p:sp>
+        <p:nvSpPr>
+          <p:cNvPr id="7" name="Rounded Rectangle 6"/>
+          <p:cNvSpPr/>
+          <p:nvPr/>
+        </p:nvSpPr>
+        <p:spPr>
+          <a:xfrm>
+            <a:off x="8138160" y="4956048"/>
+            <a:ext cx="2121408" cy="493776"/>
+          </a:xfrm>
+          <a:prstGeom prst="roundRect">
+            <a:avLst>
+              <a:gd name="adj" fmla="val 50000"/>
+            </a:avLst>
+          </a:prstGeom>
+          <a:solidFill>
+            <a:srgbClr val="4E7FA6"/>
+          </a:solidFill>
+          <a:ln>
+            <a:noFill/>
+          </a:ln>
+          <a:effectLst/>
+        </p:spPr>
+        <p:style>
+          <a:lnRef idx="1">
+            <a:schemeClr val="accent1"/>
+          </a:lnRef>
+          <a:fillRef idx="3">
+            <a:schemeClr val="accent1"/>
+          </a:fillRef>
+          <a:effectRef idx="2">
+            <a:schemeClr val="accent1"/>
+          </a:effectRef>
+          <a:fontRef idx="minor">
+            <a:schemeClr val="lt1"/>
+          </a:fontRef>
+        </p:style>
+        <p:txBody>
+          <a:bodyPr rtlCol="0" anchor="ctr"/>
+          <a:lstStyle/>
+          <a:p>
+            <a:pPr algn="ctr"/>
+          </a:p>
+        </p:txBody>
+      </p:sp>
+      <p:sp>
+        <p:nvSpPr>
+          <p:cNvPr id="8" name="TextBox 7"/>
+          <p:cNvSpPr txBox="1"/>
+          <p:nvPr/>
+        </p:nvSpPr>
+        <p:spPr>
+          <a:xfrm>
+            <a:off x="8183880" y="4956048"/>
+            <a:ext cx="2029967" cy="493776"/>
+          </a:xfrm>
+          <a:prstGeom prst="rect">
+            <a:avLst/>
+          </a:prstGeom>
+          <a:noFill/>
+        </p:spPr>
+        <p:txBody>
+          <a:bodyPr wrap="square" lIns="0" rIns="0" tIns="0" bIns="0" anchor="ctr">
+            <a:spAutoFit/>
+          </a:bodyPr>
+          <a:lstStyle/>
+          <a:p>
+            <a:pPr algn="ctr">
+              <a:lnSpc>
+                <a:spcPct val="107000"/>
+              </a:lnSpc>
+              <a:spcAft>
+                <a:spcPts val="0"/>
+              </a:spcAft>
+            </a:pPr>
+            <a:r>
+              <a:rPr sz="1200" b="1" i="0">
                 <a:solidFill>
                   <a:srgbClr val="FFFFFF"/>
                 </a:solidFill>
+                <a:latin typeface="Noto Sans"/>
               </a:rPr>
-              <a:t>Data resmi BPS (Sakernas) — Februari 2024 sampai Mei 2026, dapat direproduksi dari script dan query SQL di repo.</a:t>
-            </a:r>
-          </a:p>
+              <a:t>TPT nasional 4,65%</a:t>
+            </a:r>
+          </a:p>
+        </p:txBody>
+      </p:sp>
+      <p:sp>
+        <p:nvSpPr>
+          <p:cNvPr id="9" name="TextBox 8"/>
+          <p:cNvSpPr txBox="1"/>
+          <p:nvPr/>
+        </p:nvSpPr>
+        <p:spPr>
+          <a:xfrm>
+            <a:off x="640080" y="932688"/>
+            <a:ext cx="5806440" cy="1783080"/>
+          </a:xfrm>
+          <a:prstGeom prst="rect">
+            <a:avLst/>
+          </a:prstGeom>
+          <a:noFill/>
+        </p:spPr>
+        <p:txBody>
+          <a:bodyPr wrap="square" lIns="0" rIns="0" tIns="0" bIns="0">
+            <a:spAutoFit/>
+          </a:bodyPr>
+          <a:lstStyle/>
           <a:p>
             <a:pPr>
+              <a:lnSpc>
+                <a:spcPct val="107000"/>
+              </a:lnSpc>
               <a:spcAft>
                 <a:spcPts val="800"/>
               </a:spcAft>
             </a:pPr>
             <a:r>
-              <a:rPr sz="1600" b="0" i="0">
-                <a:solidFill>
-                  <a:srgbClr val="FFFFFF"/>
-                </a:solidFill>
+              <a:rPr sz="3300" b="1" i="0">
+                <a:solidFill>
+                  <a:srgbClr val="2E3138"/>
+                </a:solidFill>
+                <a:latin typeface="Noto Sans"/>
               </a:rPr>
-              <a:t>Plus: paket dashboard Power BI (star schema anti-jebakan, DAX, panduan rakit)</a:t>
-            </a:r>
-          </a:p>
-        </p:txBody>
-      </p:sp>
-      <p:sp>
-        <p:nvSpPr>
-          <p:cNvPr id="5" name="TextBox 4"/>
+              <a:t>ANALISIS PENGANGGURAN INDONESIA 2026</a:t>
+            </a:r>
+          </a:p>
+        </p:txBody>
+      </p:sp>
+      <p:sp>
+        <p:nvSpPr>
+          <p:cNvPr id="10" name="TextBox 9"/>
           <p:cNvSpPr txBox="1"/>
           <p:nvPr/>
         </p:nvSpPr>
         <p:spPr>
           <a:xfrm>
-            <a:off x="822960" y="5486400"/>
-            <a:ext cx="10515600" cy="731520"/>
+            <a:off x="640080" y="2615184"/>
+            <a:ext cx="5669280" cy="1005840"/>
           </a:xfrm>
           <a:prstGeom prst="rect">
             <a:avLst/>
@@ -3251,21 +3495,174 @@
           <a:noFill/>
         </p:spPr>
         <p:txBody>
-          <a:bodyPr wrap="square">
+          <a:bodyPr wrap="square" lIns="0" rIns="0" tIns="0" bIns="0">
             <a:spAutoFit/>
           </a:bodyPr>
           <a:lstStyle/>
           <a:p>
             <a:pPr>
+              <a:lnSpc>
+                <a:spcPct val="107000"/>
+              </a:lnSpc>
               <a:spcAft>
                 <a:spcPts val="800"/>
               </a:spcAft>
             </a:pPr>
             <a:r>
-              <a:rPr sz="2000" b="1" i="0">
-                <a:solidFill>
-                  <a:srgbClr val="FFFFFF"/>
-                </a:solidFill>
+              <a:rPr sz="1700" b="1" i="0">
+                <a:solidFill>
+                  <a:srgbClr val="4E7FA6"/>
+                </a:solidFill>
+                <a:latin typeface="Noto Sans"/>
+              </a:rPr>
+              <a:t>Paradoks Pendidikan: TPT Nasional Turun, tapi Lulusan SMK Paling Sulit Dapat Kerja</a:t>
+            </a:r>
+          </a:p>
+        </p:txBody>
+      </p:sp>
+      <p:sp>
+        <p:nvSpPr>
+          <p:cNvPr id="11" name="TextBox 10"/>
+          <p:cNvSpPr txBox="1"/>
+          <p:nvPr/>
+        </p:nvSpPr>
+        <p:spPr>
+          <a:xfrm>
+            <a:off x="640080" y="3712463"/>
+            <a:ext cx="5577840" cy="1325880"/>
+          </a:xfrm>
+          <a:prstGeom prst="rect">
+            <a:avLst/>
+          </a:prstGeom>
+          <a:noFill/>
+        </p:spPr>
+        <p:txBody>
+          <a:bodyPr wrap="square" lIns="0" rIns="0" tIns="0" bIns="0">
+            <a:spAutoFit/>
+          </a:bodyPr>
+          <a:lstStyle/>
+          <a:p>
+            <a:pPr>
+              <a:lnSpc>
+                <a:spcPct val="107000"/>
+              </a:lnSpc>
+              <a:spcAft>
+                <a:spcPts val="800"/>
+              </a:spcAft>
+            </a:pPr>
+            <a:r>
+              <a:rPr sz="1400" b="0" i="0">
+                <a:solidFill>
+                  <a:srgbClr val="2E3138"/>
+                </a:solidFill>
+                <a:latin typeface="Noto Sans"/>
+              </a:rPr>
+              <a:t>Data resmi BPS (Sakernas), Februari 2024 sampai Mei 2026. Dapat direproduksi dari script dan query SQL di repo.</a:t>
+            </a:r>
+          </a:p>
+          <a:p>
+            <a:pPr>
+              <a:lnSpc>
+                <a:spcPct val="107000"/>
+              </a:lnSpc>
+              <a:spcAft>
+                <a:spcPts val="800"/>
+              </a:spcAft>
+            </a:pPr>
+            <a:r>
+              <a:rPr sz="1400" b="0" i="0">
+                <a:solidFill>
+                  <a:srgbClr val="2E3138"/>
+                </a:solidFill>
+                <a:latin typeface="Noto Sans"/>
+              </a:rPr>
+              <a:t>Plus: paket dashboard Power BI (star schema anti-jebakan, DAX, panduan rakit)</a:t>
+            </a:r>
+          </a:p>
+        </p:txBody>
+      </p:sp>
+      <p:sp>
+        <p:nvSpPr>
+          <p:cNvPr id="12" name="Rounded Rectangle 11"/>
+          <p:cNvSpPr/>
+          <p:nvPr/>
+        </p:nvSpPr>
+        <p:spPr>
+          <a:xfrm>
+            <a:off x="658368" y="5596128"/>
+            <a:ext cx="566928" cy="82296"/>
+          </a:xfrm>
+          <a:prstGeom prst="roundRect">
+            <a:avLst>
+              <a:gd name="adj" fmla="val 50000"/>
+            </a:avLst>
+          </a:prstGeom>
+          <a:solidFill>
+            <a:srgbClr val="C75B7F"/>
+          </a:solidFill>
+          <a:ln>
+            <a:noFill/>
+          </a:ln>
+          <a:effectLst/>
+        </p:spPr>
+        <p:style>
+          <a:lnRef idx="1">
+            <a:schemeClr val="accent1"/>
+          </a:lnRef>
+          <a:fillRef idx="3">
+            <a:schemeClr val="accent1"/>
+          </a:fillRef>
+          <a:effectRef idx="2">
+            <a:schemeClr val="accent1"/>
+          </a:effectRef>
+          <a:fontRef idx="minor">
+            <a:schemeClr val="lt1"/>
+          </a:fontRef>
+        </p:style>
+        <p:txBody>
+          <a:bodyPr rtlCol="0" anchor="ctr"/>
+          <a:lstStyle/>
+          <a:p>
+            <a:pPr algn="ctr"/>
+          </a:p>
+        </p:txBody>
+      </p:sp>
+      <p:sp>
+        <p:nvSpPr>
+          <p:cNvPr id="13" name="TextBox 12"/>
+          <p:cNvSpPr txBox="1"/>
+          <p:nvPr/>
+        </p:nvSpPr>
+        <p:spPr>
+          <a:xfrm>
+            <a:off x="640080" y="5779008"/>
+            <a:ext cx="5806440" cy="548640"/>
+          </a:xfrm>
+          <a:prstGeom prst="rect">
+            <a:avLst/>
+          </a:prstGeom>
+          <a:noFill/>
+        </p:spPr>
+        <p:txBody>
+          <a:bodyPr wrap="square" lIns="0" rIns="0" tIns="0" bIns="0">
+            <a:spAutoFit/>
+          </a:bodyPr>
+          <a:lstStyle/>
+          <a:p>
+            <a:pPr>
+              <a:lnSpc>
+                <a:spcPct val="107000"/>
+              </a:lnSpc>
+              <a:spcAft>
+                <a:spcPts val="800"/>
+              </a:spcAft>
+            </a:pPr>
+            <a:r>
+              <a:rPr sz="1900" b="1" i="0">
+                <a:solidFill>
+                  <a:srgbClr val="2E3138"/>
+                </a:solidFill>
+                <a:latin typeface="Noto Sans"/>
               </a:rPr>
               <a:t>BAGHIZ ASSHIDDIQIE ARASYA</a:t>
             </a:r>
@@ -3286,7 +3683,7 @@
     <p:bg>
       <p:bgPr>
         <a:solidFill>
-          <a:srgbClr val="FFFFFF"/>
+          <a:srgbClr val="EFE7D8"/>
         </a:solidFill>
         <a:effectLst/>
       </p:bgPr>
@@ -3300,62 +3697,29 @@
       <p:grpSpPr/>
       <p:sp>
         <p:nvSpPr>
-          <p:cNvPr id="2" name="TextBox 1"/>
-          <p:cNvSpPr txBox="1"/>
-          <p:nvPr/>
-        </p:nvSpPr>
-        <p:spPr>
-          <a:xfrm>
-            <a:off x="640080" y="274320"/>
-            <a:ext cx="10881360" cy="822960"/>
-          </a:xfrm>
-          <a:prstGeom prst="rect">
-            <a:avLst/>
-          </a:prstGeom>
-          <a:noFill/>
-        </p:spPr>
-        <p:txBody>
-          <a:bodyPr wrap="square">
-            <a:spAutoFit/>
-          </a:bodyPr>
-          <a:lstStyle/>
-          <a:p>
-            <a:pPr>
-              <a:spcAft>
-                <a:spcPts val="800"/>
-              </a:spcAft>
-            </a:pPr>
-            <a:r>
-              <a:rPr sz="3000" b="1" i="0">
-                <a:solidFill>
-                  <a:srgbClr val="1E3A8A"/>
-                </a:solidFill>
-              </a:rPr>
-              <a:t>Penutup</a:t>
-            </a:r>
-          </a:p>
-        </p:txBody>
-      </p:sp>
-      <p:sp>
-        <p:nvSpPr>
-          <p:cNvPr id="3" name="Rectangle 2"/>
+          <p:cNvPr id="2" name="Rounded Rectangle 1"/>
           <p:cNvSpPr/>
           <p:nvPr/>
         </p:nvSpPr>
         <p:spPr>
           <a:xfrm>
-            <a:off x="640080" y="1051560"/>
-            <a:ext cx="1371600" cy="54864"/>
-          </a:xfrm>
-          <a:prstGeom prst="rect">
-            <a:avLst/>
+            <a:off x="502920" y="457200"/>
+            <a:ext cx="11183112" cy="5943600"/>
+          </a:xfrm>
+          <a:prstGeom prst="roundRect">
+            <a:avLst>
+              <a:gd name="adj" fmla="val 2769"/>
+            </a:avLst>
           </a:prstGeom>
           <a:solidFill>
-            <a:srgbClr val="0D9488"/>
+            <a:srgbClr val="F7F1E5"/>
           </a:solidFill>
-          <a:ln>
-            <a:noFill/>
+          <a:ln w="12700">
+            <a:solidFill>
+              <a:srgbClr val="DED2BA"/>
+            </a:solidFill>
           </a:ln>
+          <a:effectLst/>
         </p:spPr>
         <p:style>
           <a:lnRef idx="1">
@@ -3381,14 +3745,60 @@
       </p:sp>
       <p:sp>
         <p:nvSpPr>
+          <p:cNvPr id="3" name="Rounded Rectangle 2"/>
+          <p:cNvSpPr/>
+          <p:nvPr/>
+        </p:nvSpPr>
+        <p:spPr>
+          <a:xfrm>
+            <a:off x="585216" y="539496"/>
+            <a:ext cx="11018520" cy="5779008"/>
+          </a:xfrm>
+          <a:prstGeom prst="roundRect">
+            <a:avLst>
+              <a:gd name="adj" fmla="val 2531"/>
+            </a:avLst>
+          </a:prstGeom>
+          <a:noFill/>
+          <a:ln w="15240">
+            <a:solidFill>
+              <a:srgbClr val="EFC3D2"/>
+            </a:solidFill>
+          </a:ln>
+          <a:effectLst/>
+        </p:spPr>
+        <p:style>
+          <a:lnRef idx="1">
+            <a:schemeClr val="accent1"/>
+          </a:lnRef>
+          <a:fillRef idx="3">
+            <a:schemeClr val="accent1"/>
+          </a:fillRef>
+          <a:effectRef idx="2">
+            <a:schemeClr val="accent1"/>
+          </a:effectRef>
+          <a:fontRef idx="minor">
+            <a:schemeClr val="lt1"/>
+          </a:fontRef>
+        </p:style>
+        <p:txBody>
+          <a:bodyPr rtlCol="0" anchor="ctr"/>
+          <a:lstStyle/>
+          <a:p>
+            <a:pPr algn="ctr"/>
+          </a:p>
+        </p:txBody>
+      </p:sp>
+      <p:sp>
+        <p:nvSpPr>
           <p:cNvPr id="4" name="TextBox 3"/>
           <p:cNvSpPr txBox="1"/>
           <p:nvPr/>
         </p:nvSpPr>
         <p:spPr>
           <a:xfrm>
-            <a:off x="640080" y="1371600"/>
-            <a:ext cx="10881360" cy="4754880"/>
+            <a:off x="914400" y="749808"/>
+            <a:ext cx="10332720" cy="365760"/>
           </a:xfrm>
           <a:prstGeom prst="rect">
             <a:avLst/>
@@ -3396,84 +3806,572 @@
           <a:noFill/>
         </p:spPr>
         <p:txBody>
-          <a:bodyPr wrap="square">
+          <a:bodyPr wrap="square" lIns="0" rIns="0" tIns="0" bIns="0">
             <a:spAutoFit/>
           </a:bodyPr>
           <a:lstStyle/>
           <a:p>
-            <a:pPr marL="171450" indent="-171450">
-              <a:spcBef>
-                <a:spcPts val="200"/>
-              </a:spcBef>
+            <a:pPr>
+              <a:lnSpc>
+                <a:spcPct val="107000"/>
+              </a:lnSpc>
               <a:spcAft>
-                <a:spcPts val="1000"/>
+                <a:spcPts val="800"/>
               </a:spcAft>
-              <a:buChar char="•"/>
             </a:pPr>
             <a:r>
-              <a:rPr sz="1700" b="0" i="0">
-                <a:solidFill>
-                  <a:srgbClr val="1F2937"/>
-                </a:solidFill>
+              <a:rPr sz="1200" b="1" i="0">
+                <a:solidFill>
+                  <a:srgbClr val="5F5B4F"/>
+                </a:solidFill>
+                <a:latin typeface="Noto Sans"/>
+              </a:rPr>
+              <a:t>PENUTUP</a:t>
+            </a:r>
+          </a:p>
+        </p:txBody>
+      </p:sp>
+      <p:sp>
+        <p:nvSpPr>
+          <p:cNvPr id="5" name="TextBox 4"/>
+          <p:cNvSpPr txBox="1"/>
+          <p:nvPr/>
+        </p:nvSpPr>
+        <p:spPr>
+          <a:xfrm>
+            <a:off x="914400" y="1115568"/>
+            <a:ext cx="10332720" cy="1234440"/>
+          </a:xfrm>
+          <a:prstGeom prst="rect">
+            <a:avLst/>
+          </a:prstGeom>
+          <a:noFill/>
+        </p:spPr>
+        <p:txBody>
+          <a:bodyPr wrap="square" lIns="0" rIns="0" tIns="0" bIns="0">
+            <a:spAutoFit/>
+          </a:bodyPr>
+          <a:lstStyle/>
+          <a:p>
+            <a:pPr>
+              <a:lnSpc>
+                <a:spcPct val="107000"/>
+              </a:lnSpc>
+              <a:spcAft>
+                <a:spcPts val="800"/>
+              </a:spcAft>
+            </a:pPr>
+            <a:r>
+              <a:rPr sz="1750" b="0" i="0">
+                <a:solidFill>
+                  <a:srgbClr val="2E3138"/>
+                </a:solidFill>
+                <a:latin typeface="Noto Sans"/>
               </a:rPr>
               <a:t>Kisah dua sisi 2026: TPT nasional turun ke 4,65% seiring ekonomi yang tumbuh 5,29%, tapi lulusan SMK (7,68%) dan anak muda 15-24 tahun (17,37%) tetap jadi kelompok paling tertekan.</a:t>
             </a:r>
           </a:p>
-          <a:p>
-            <a:pPr marL="171450" indent="-171450">
-              <a:spcBef>
-                <a:spcPts val="200"/>
-              </a:spcBef>
+        </p:txBody>
+      </p:sp>
+      <p:sp>
+        <p:nvSpPr>
+          <p:cNvPr id="6" name="Rounded Rectangle 5"/>
+          <p:cNvSpPr/>
+          <p:nvPr/>
+        </p:nvSpPr>
+        <p:spPr>
+          <a:xfrm>
+            <a:off x="914400" y="2395728"/>
+            <a:ext cx="2606040" cy="502920"/>
+          </a:xfrm>
+          <a:prstGeom prst="roundRect">
+            <a:avLst>
+              <a:gd name="adj" fmla="val 50000"/>
+            </a:avLst>
+          </a:prstGeom>
+          <a:solidFill>
+            <a:srgbClr val="4E7FA6"/>
+          </a:solidFill>
+          <a:ln>
+            <a:noFill/>
+          </a:ln>
+          <a:effectLst/>
+        </p:spPr>
+        <p:style>
+          <a:lnRef idx="1">
+            <a:schemeClr val="accent1"/>
+          </a:lnRef>
+          <a:fillRef idx="3">
+            <a:schemeClr val="accent1"/>
+          </a:fillRef>
+          <a:effectRef idx="2">
+            <a:schemeClr val="accent1"/>
+          </a:effectRef>
+          <a:fontRef idx="minor">
+            <a:schemeClr val="lt1"/>
+          </a:fontRef>
+        </p:style>
+        <p:txBody>
+          <a:bodyPr rtlCol="0" anchor="ctr"/>
+          <a:lstStyle/>
+          <a:p>
+            <a:pPr algn="ctr"/>
+          </a:p>
+        </p:txBody>
+      </p:sp>
+      <p:sp>
+        <p:nvSpPr>
+          <p:cNvPr id="7" name="TextBox 6"/>
+          <p:cNvSpPr txBox="1"/>
+          <p:nvPr/>
+        </p:nvSpPr>
+        <p:spPr>
+          <a:xfrm>
+            <a:off x="960120" y="2395728"/>
+            <a:ext cx="2514600" cy="502920"/>
+          </a:xfrm>
+          <a:prstGeom prst="rect">
+            <a:avLst/>
+          </a:prstGeom>
+          <a:noFill/>
+        </p:spPr>
+        <p:txBody>
+          <a:bodyPr wrap="square" lIns="0" rIns="0" tIns="0" bIns="0" anchor="ctr">
+            <a:spAutoFit/>
+          </a:bodyPr>
+          <a:lstStyle/>
+          <a:p>
+            <a:pPr algn="ctr">
+              <a:lnSpc>
+                <a:spcPct val="107000"/>
+              </a:lnSpc>
               <a:spcAft>
-                <a:spcPts val="1000"/>
+                <a:spcPts val="0"/>
               </a:spcAft>
-              <a:buChar char="•"/>
             </a:pPr>
             <a:r>
-              <a:rPr sz="1700" b="0" i="0">
-                <a:solidFill>
-                  <a:srgbClr val="1F2937"/>
-                </a:solidFill>
+              <a:rPr sz="1250" b="1" i="0">
+                <a:solidFill>
+                  <a:srgbClr val="FFFFFF"/>
+                </a:solidFill>
+                <a:latin typeface="Noto Sans"/>
+              </a:rPr>
+              <a:t>TPT nasional 4,65%</a:t>
+            </a:r>
+          </a:p>
+        </p:txBody>
+      </p:sp>
+      <p:sp>
+        <p:nvSpPr>
+          <p:cNvPr id="8" name="Rounded Rectangle 7"/>
+          <p:cNvSpPr/>
+          <p:nvPr/>
+        </p:nvSpPr>
+        <p:spPr>
+          <a:xfrm>
+            <a:off x="3657600" y="2395728"/>
+            <a:ext cx="2103120" cy="502920"/>
+          </a:xfrm>
+          <a:prstGeom prst="roundRect">
+            <a:avLst>
+              <a:gd name="adj" fmla="val 50000"/>
+            </a:avLst>
+          </a:prstGeom>
+          <a:solidFill>
+            <a:srgbClr val="C75B7F"/>
+          </a:solidFill>
+          <a:ln>
+            <a:noFill/>
+          </a:ln>
+          <a:effectLst/>
+        </p:spPr>
+        <p:style>
+          <a:lnRef idx="1">
+            <a:schemeClr val="accent1"/>
+          </a:lnRef>
+          <a:fillRef idx="3">
+            <a:schemeClr val="accent1"/>
+          </a:fillRef>
+          <a:effectRef idx="2">
+            <a:schemeClr val="accent1"/>
+          </a:effectRef>
+          <a:fontRef idx="minor">
+            <a:schemeClr val="lt1"/>
+          </a:fontRef>
+        </p:style>
+        <p:txBody>
+          <a:bodyPr rtlCol="0" anchor="ctr"/>
+          <a:lstStyle/>
+          <a:p>
+            <a:pPr algn="ctr"/>
+          </a:p>
+        </p:txBody>
+      </p:sp>
+      <p:sp>
+        <p:nvSpPr>
+          <p:cNvPr id="9" name="TextBox 8"/>
+          <p:cNvSpPr txBox="1"/>
+          <p:nvPr/>
+        </p:nvSpPr>
+        <p:spPr>
+          <a:xfrm>
+            <a:off x="3703320" y="2395728"/>
+            <a:ext cx="2011679" cy="502920"/>
+          </a:xfrm>
+          <a:prstGeom prst="rect">
+            <a:avLst/>
+          </a:prstGeom>
+          <a:noFill/>
+        </p:spPr>
+        <p:txBody>
+          <a:bodyPr wrap="square" lIns="0" rIns="0" tIns="0" bIns="0" anchor="ctr">
+            <a:spAutoFit/>
+          </a:bodyPr>
+          <a:lstStyle/>
+          <a:p>
+            <a:pPr algn="ctr">
+              <a:lnSpc>
+                <a:spcPct val="107000"/>
+              </a:lnSpc>
+              <a:spcAft>
+                <a:spcPts val="0"/>
+              </a:spcAft>
+            </a:pPr>
+            <a:r>
+              <a:rPr sz="1250" b="1" i="0">
+                <a:solidFill>
+                  <a:srgbClr val="FFFFFF"/>
+                </a:solidFill>
+                <a:latin typeface="Noto Sans"/>
+              </a:rPr>
+              <a:t>SMK 7,68%</a:t>
+            </a:r>
+          </a:p>
+        </p:txBody>
+      </p:sp>
+      <p:sp>
+        <p:nvSpPr>
+          <p:cNvPr id="10" name="Rounded Rectangle 9"/>
+          <p:cNvSpPr/>
+          <p:nvPr/>
+        </p:nvSpPr>
+        <p:spPr>
+          <a:xfrm>
+            <a:off x="5897880" y="2395728"/>
+            <a:ext cx="2788920" cy="502920"/>
+          </a:xfrm>
+          <a:prstGeom prst="roundRect">
+            <a:avLst>
+              <a:gd name="adj" fmla="val 50000"/>
+            </a:avLst>
+          </a:prstGeom>
+          <a:solidFill>
+            <a:srgbClr val="EFC3D2"/>
+          </a:solidFill>
+          <a:ln>
+            <a:noFill/>
+          </a:ln>
+          <a:effectLst/>
+        </p:spPr>
+        <p:style>
+          <a:lnRef idx="1">
+            <a:schemeClr val="accent1"/>
+          </a:lnRef>
+          <a:fillRef idx="3">
+            <a:schemeClr val="accent1"/>
+          </a:fillRef>
+          <a:effectRef idx="2">
+            <a:schemeClr val="accent1"/>
+          </a:effectRef>
+          <a:fontRef idx="minor">
+            <a:schemeClr val="lt1"/>
+          </a:fontRef>
+        </p:style>
+        <p:txBody>
+          <a:bodyPr rtlCol="0" anchor="ctr"/>
+          <a:lstStyle/>
+          <a:p>
+            <a:pPr algn="ctr"/>
+          </a:p>
+        </p:txBody>
+      </p:sp>
+      <p:sp>
+        <p:nvSpPr>
+          <p:cNvPr id="11" name="TextBox 10"/>
+          <p:cNvSpPr txBox="1"/>
+          <p:nvPr/>
+        </p:nvSpPr>
+        <p:spPr>
+          <a:xfrm>
+            <a:off x="5943600" y="2395728"/>
+            <a:ext cx="2697479" cy="502920"/>
+          </a:xfrm>
+          <a:prstGeom prst="rect">
+            <a:avLst/>
+          </a:prstGeom>
+          <a:noFill/>
+        </p:spPr>
+        <p:txBody>
+          <a:bodyPr wrap="square" lIns="0" rIns="0" tIns="0" bIns="0" anchor="ctr">
+            <a:spAutoFit/>
+          </a:bodyPr>
+          <a:lstStyle/>
+          <a:p>
+            <a:pPr algn="ctr">
+              <a:lnSpc>
+                <a:spcPct val="107000"/>
+              </a:lnSpc>
+              <a:spcAft>
+                <a:spcPts val="0"/>
+              </a:spcAft>
+            </a:pPr>
+            <a:r>
+              <a:rPr sz="1250" b="1" i="0">
+                <a:solidFill>
+                  <a:srgbClr val="2E3138"/>
+                </a:solidFill>
+                <a:latin typeface="Noto Sans"/>
+              </a:rPr>
+              <a:t>Muda 15-24: 17,37%</a:t>
+            </a:r>
+          </a:p>
+        </p:txBody>
+      </p:sp>
+      <p:sp>
+        <p:nvSpPr>
+          <p:cNvPr id="12" name="TextBox 11"/>
+          <p:cNvSpPr txBox="1"/>
+          <p:nvPr/>
+        </p:nvSpPr>
+        <p:spPr>
+          <a:xfrm>
+            <a:off x="914400" y="3127248"/>
+            <a:ext cx="10332720" cy="1417320"/>
+          </a:xfrm>
+          <a:prstGeom prst="rect">
+            <a:avLst/>
+          </a:prstGeom>
+          <a:noFill/>
+        </p:spPr>
+        <p:txBody>
+          <a:bodyPr wrap="square" lIns="0" rIns="0" tIns="0" bIns="0">
+            <a:spAutoFit/>
+          </a:bodyPr>
+          <a:lstStyle/>
+          <a:p>
+            <a:pPr>
+              <a:lnSpc>
+                <a:spcPct val="107000"/>
+              </a:lnSpc>
+              <a:spcAft>
+                <a:spcPts val="800"/>
+              </a:spcAft>
+            </a:pPr>
+            <a:r>
+              <a:rPr sz="1350" b="0" i="0">
+                <a:solidFill>
+                  <a:srgbClr val="5F5B4F"/>
+                </a:solidFill>
+                <a:latin typeface="Noto Sans"/>
               </a:rPr>
               <a:t>Isi repo: analysis.ipynb, data/compiled + SOURCES.md, sql/queries.sql (semua angka diverifikasi ulang lewat SQL), scripts, charts, findings.json.</a:t>
             </a:r>
           </a:p>
           <a:p>
-            <a:pPr marL="171450" indent="-171450">
-              <a:spcBef>
-                <a:spcPts val="200"/>
-              </a:spcBef>
+            <a:pPr>
+              <a:lnSpc>
+                <a:spcPct val="107000"/>
+              </a:lnSpc>
               <a:spcAft>
-                <a:spcPts val="1000"/>
+                <a:spcPts val="800"/>
               </a:spcAft>
-              <a:buChar char="•"/>
             </a:pPr>
             <a:r>
-              <a:rPr sz="1700" b="0" i="0">
-                <a:solidFill>
-                  <a:srgbClr val="1F2937"/>
-                </a:solidFill>
+              <a:rPr sz="1350" b="0" i="0">
+                <a:solidFill>
+                  <a:srgbClr val="5F5B4F"/>
+                </a:solidFill>
+                <a:latin typeface="Noto Sans"/>
               </a:rPr>
-              <a:t>Plus kit dashboard Power BI: star schema anti-jebakan (fact_tpt_nasional dan fact_tpt_segmen terpisah agar measure tidak terkontaminasi), measure DAX, layout dashboard, dan panduan rakit 20-30 menit — lihat powerbi/measures_dax_CATATAN_LEVEL.md dulu.</a:t>
-            </a:r>
-          </a:p>
-          <a:p>
-            <a:pPr marL="171450" indent="-171450">
-              <a:spcBef>
-                <a:spcPts val="200"/>
-              </a:spcBef>
+              <a:t>Plus kit dashboard Power BI: star schema anti-jebakan (fact_tpt_nasional dan fact_tpt_segmen terpisah agar measure tidak terkontaminasi), measure DAX, layout dashboard, dan panduan rakit 20-30 menit. Lihat powerbi/measures_dax_CATATAN_LEVEL.md dulu.</a:t>
+            </a:r>
+          </a:p>
+        </p:txBody>
+      </p:sp>
+      <p:sp>
+        <p:nvSpPr>
+          <p:cNvPr id="13" name="TextBox 12"/>
+          <p:cNvSpPr txBox="1"/>
+          <p:nvPr/>
+        </p:nvSpPr>
+        <p:spPr>
+          <a:xfrm>
+            <a:off x="914400" y="4590288"/>
+            <a:ext cx="10332720" cy="411480"/>
+          </a:xfrm>
+          <a:prstGeom prst="rect">
+            <a:avLst/>
+          </a:prstGeom>
+          <a:noFill/>
+        </p:spPr>
+        <p:txBody>
+          <a:bodyPr wrap="square" lIns="0" rIns="0" tIns="0" bIns="0">
+            <a:spAutoFit/>
+          </a:bodyPr>
+          <a:lstStyle/>
+          <a:p>
+            <a:pPr>
+              <a:lnSpc>
+                <a:spcPct val="107000"/>
+              </a:lnSpc>
               <a:spcAft>
-                <a:spcPts val="1000"/>
+                <a:spcPts val="800"/>
               </a:spcAft>
-              <a:buChar char="•"/>
             </a:pPr>
             <a:r>
-              <a:rPr sz="1700" b="0" i="0">
-                <a:solidFill>
-                  <a:srgbClr val="1F2937"/>
-                </a:solidFill>
+              <a:rPr sz="1250" b="0" i="1">
+                <a:solidFill>
+                  <a:srgbClr val="5F5B4F"/>
+                </a:solidFill>
+                <a:latin typeface="Noto Sans"/>
               </a:rPr>
-              <a:t>Keterbatasan: angka Mei 2026 hanya untuk 17 provinsi; dataset ini kompilasi angka publikasi resmi, bukan mikrodataset Sakernas. Terima kasih.</a:t>
+              <a:t>Keterbatasan: angka Mei 2026 hanya untuk 17 provinsi; dataset ini kompilasi angka publikasi resmi, bukan mikrodataset Sakernas.</a:t>
+            </a:r>
+          </a:p>
+        </p:txBody>
+      </p:sp>
+      <p:sp>
+        <p:nvSpPr>
+          <p:cNvPr id="14" name="Rounded Rectangle 13"/>
+          <p:cNvSpPr/>
+          <p:nvPr/>
+        </p:nvSpPr>
+        <p:spPr>
+          <a:xfrm>
+            <a:off x="932688" y="5138928"/>
+            <a:ext cx="566928" cy="82296"/>
+          </a:xfrm>
+          <a:prstGeom prst="roundRect">
+            <a:avLst>
+              <a:gd name="adj" fmla="val 50000"/>
+            </a:avLst>
+          </a:prstGeom>
+          <a:solidFill>
+            <a:srgbClr val="C75B7F"/>
+          </a:solidFill>
+          <a:ln>
+            <a:noFill/>
+          </a:ln>
+          <a:effectLst/>
+        </p:spPr>
+        <p:style>
+          <a:lnRef idx="1">
+            <a:schemeClr val="accent1"/>
+          </a:lnRef>
+          <a:fillRef idx="3">
+            <a:schemeClr val="accent1"/>
+          </a:fillRef>
+          <a:effectRef idx="2">
+            <a:schemeClr val="accent1"/>
+          </a:effectRef>
+          <a:fontRef idx="minor">
+            <a:schemeClr val="lt1"/>
+          </a:fontRef>
+        </p:style>
+        <p:txBody>
+          <a:bodyPr rtlCol="0" anchor="ctr"/>
+          <a:lstStyle/>
+          <a:p>
+            <a:pPr algn="ctr"/>
+          </a:p>
+        </p:txBody>
+      </p:sp>
+      <p:sp>
+        <p:nvSpPr>
+          <p:cNvPr id="15" name="TextBox 14"/>
+          <p:cNvSpPr txBox="1"/>
+          <p:nvPr/>
+        </p:nvSpPr>
+        <p:spPr>
+          <a:xfrm>
+            <a:off x="914400" y="5321808"/>
+            <a:ext cx="10332720" cy="640080"/>
+          </a:xfrm>
+          <a:prstGeom prst="rect">
+            <a:avLst/>
+          </a:prstGeom>
+          <a:noFill/>
+        </p:spPr>
+        <p:txBody>
+          <a:bodyPr wrap="square" lIns="0" rIns="0" tIns="0" bIns="0">
+            <a:spAutoFit/>
+          </a:bodyPr>
+          <a:lstStyle/>
+          <a:p>
+            <a:pPr>
+              <a:lnSpc>
+                <a:spcPct val="107000"/>
+              </a:lnSpc>
+              <a:spcAft>
+                <a:spcPts val="800"/>
+              </a:spcAft>
+            </a:pPr>
+            <a:r>
+              <a:rPr sz="2700" b="1" i="0">
+                <a:solidFill>
+                  <a:srgbClr val="2E3138"/>
+                </a:solidFill>
+                <a:latin typeface="Noto Sans"/>
+              </a:rPr>
+              <a:t>BAGHIZ ASSHIDDIQIE ARASYA</a:t>
+            </a:r>
+          </a:p>
+        </p:txBody>
+      </p:sp>
+      <p:sp>
+        <p:nvSpPr>
+          <p:cNvPr id="16" name="TextBox 15"/>
+          <p:cNvSpPr txBox="1"/>
+          <p:nvPr/>
+        </p:nvSpPr>
+        <p:spPr>
+          <a:xfrm>
+            <a:off x="914400" y="5961888"/>
+            <a:ext cx="10332720" cy="411480"/>
+          </a:xfrm>
+          <a:prstGeom prst="rect">
+            <a:avLst/>
+          </a:prstGeom>
+          <a:noFill/>
+        </p:spPr>
+        <p:txBody>
+          <a:bodyPr wrap="square" lIns="0" rIns="0" tIns="0" bIns="0">
+            <a:spAutoFit/>
+          </a:bodyPr>
+          <a:lstStyle/>
+          <a:p>
+            <a:pPr>
+              <a:spcAft>
+                <a:spcPts val="0"/>
+              </a:spcAft>
+            </a:pPr>
+            <a:r>
+              <a:rPr sz="1400" b="1">
+                <a:solidFill>
+                  <a:srgbClr val="4E7FA6"/>
+                </a:solidFill>
+                <a:latin typeface="Noto Sans"/>
+              </a:rPr>
+              <a:t>github.com/baghizash/pengangguran-indonesia-2026</a:t>
+            </a:r>
+            <a:r>
+              <a:rPr sz="1400">
+                <a:solidFill>
+                  <a:srgbClr val="2E3138"/>
+                </a:solidFill>
+                <a:latin typeface="Noto Sans"/>
+              </a:rPr>
+              <a:t>  |  Terbuka untuk peluang data analyst dan kolaborasi analisis data publik.</a:t>
             </a:r>
           </a:p>
         </p:txBody>
@@ -3492,7 +4390,7 @@
     <p:bg>
       <p:bgPr>
         <a:solidFill>
-          <a:srgbClr val="FFFFFF"/>
+          <a:srgbClr val="EFE7D8"/>
         </a:solidFill>
         <a:effectLst/>
       </p:bgPr>
@@ -3512,8 +4410,8 @@
         </p:nvSpPr>
         <p:spPr>
           <a:xfrm>
-            <a:off x="640080" y="274320"/>
-            <a:ext cx="10881360" cy="822960"/>
+            <a:off x="502920" y="274320"/>
+            <a:ext cx="11155680" cy="777240"/>
           </a:xfrm>
           <a:prstGeom prst="rect">
             <a:avLst/>
@@ -3521,21 +4419,25 @@
           <a:noFill/>
         </p:spPr>
         <p:txBody>
-          <a:bodyPr wrap="square">
+          <a:bodyPr wrap="square" lIns="0" rIns="0" tIns="0" bIns="0">
             <a:spAutoFit/>
           </a:bodyPr>
           <a:lstStyle/>
           <a:p>
             <a:pPr>
+              <a:lnSpc>
+                <a:spcPct val="107000"/>
+              </a:lnSpc>
               <a:spcAft>
                 <a:spcPts val="800"/>
               </a:spcAft>
             </a:pPr>
             <a:r>
-              <a:rPr sz="3000" b="1" i="0">
-                <a:solidFill>
-                  <a:srgbClr val="1E3A8A"/>
-                </a:solidFill>
+              <a:rPr sz="3100" b="1" i="0">
+                <a:solidFill>
+                  <a:srgbClr val="2E3138"/>
+                </a:solidFill>
+                <a:latin typeface="Noto Sans"/>
               </a:rPr>
               <a:t>Latar Belakang dan Sumber Data</a:t>
             </a:r>
@@ -3544,24 +4446,27 @@
       </p:sp>
       <p:sp>
         <p:nvSpPr>
-          <p:cNvPr id="3" name="Rectangle 2"/>
+          <p:cNvPr id="3" name="Rounded Rectangle 2"/>
           <p:cNvSpPr/>
           <p:nvPr/>
         </p:nvSpPr>
         <p:spPr>
           <a:xfrm>
-            <a:off x="640080" y="1051560"/>
-            <a:ext cx="1371600" cy="54864"/>
-          </a:xfrm>
-          <a:prstGeom prst="rect">
-            <a:avLst/>
+            <a:off x="521207" y="1042415"/>
+            <a:ext cx="566928" cy="82296"/>
+          </a:xfrm>
+          <a:prstGeom prst="roundRect">
+            <a:avLst>
+              <a:gd name="adj" fmla="val 50000"/>
+            </a:avLst>
           </a:prstGeom>
           <a:solidFill>
-            <a:srgbClr val="0D9488"/>
+            <a:srgbClr val="C75B7F"/>
           </a:solidFill>
           <a:ln>
             <a:noFill/>
           </a:ln>
+          <a:effectLst/>
         </p:spPr>
         <p:style>
           <a:lnRef idx="1">
@@ -3593,8 +4498,8 @@
         </p:nvSpPr>
         <p:spPr>
           <a:xfrm>
-            <a:off x="640080" y="1371600"/>
-            <a:ext cx="10881360" cy="4754880"/>
+            <a:off x="502920" y="1389888"/>
+            <a:ext cx="6720840" cy="4754880"/>
           </a:xfrm>
           <a:prstGeom prst="rect">
             <a:avLst/>
@@ -3602,98 +4507,196 @@
           <a:noFill/>
         </p:spPr>
         <p:txBody>
-          <a:bodyPr wrap="square">
+          <a:bodyPr wrap="square" lIns="0" rIns="0" tIns="0" bIns="0">
             <a:spAutoFit/>
           </a:bodyPr>
           <a:lstStyle/>
           <a:p>
             <a:pPr marL="171450" indent="-171450">
-              <a:spcBef>
-                <a:spcPts val="200"/>
-              </a:spcBef>
+              <a:lnSpc>
+                <a:spcPct val="107000"/>
+              </a:lnSpc>
               <a:spcAft>
-                <a:spcPts val="1000"/>
+                <a:spcPts val="1100"/>
               </a:spcAft>
               <a:buChar char="•"/>
             </a:pPr>
             <a:r>
-              <a:rPr sz="1700" b="0" i="0">
-                <a:solidFill>
-                  <a:srgbClr val="1F2937"/>
-                </a:solidFill>
+              <a:rPr sz="1600" b="0" i="0">
+                <a:solidFill>
+                  <a:srgbClr val="2E3138"/>
+                </a:solidFill>
+                <a:latin typeface="Noto Sans"/>
               </a:rPr>
               <a:t>Tingkat Pengangguran Terbuka (TPT) nasional turun, tapi angka rata-rata menyembunyikan jurang yang lebar antar jenjang pendidikan, umur, gender, kota-desa, dan provinsi.</a:t>
             </a:r>
           </a:p>
           <a:p>
             <a:pPr marL="171450" indent="-171450">
-              <a:spcBef>
-                <a:spcPts val="200"/>
-              </a:spcBef>
+              <a:lnSpc>
+                <a:spcPct val="107000"/>
+              </a:lnSpc>
               <a:spcAft>
-                <a:spcPts val="1000"/>
+                <a:spcPts val="1100"/>
               </a:spcAft>
               <a:buChar char="•"/>
             </a:pPr>
             <a:r>
-              <a:rPr sz="1700" b="0" i="0">
-                <a:solidFill>
-                  <a:srgbClr val="1F2937"/>
-                </a:solidFill>
+              <a:rPr sz="1600" b="0" i="0">
+                <a:solidFill>
+                  <a:srgbClr val="2E3138"/>
+                </a:solidFill>
+                <a:latin typeface="Noto Sans"/>
               </a:rPr>
               <a:t>Project ini mengkompilasi angka resmi BPS dari publikasi Sakernas: 5 titik waktu (Feb 2024, Feb 2025, Agu 2025, Feb 2026, Mei 2026), dengan rincian pendidikan, umur, gender, kota-desa, dan 38 provinsi.</a:t>
             </a:r>
           </a:p>
           <a:p>
             <a:pPr marL="171450" indent="-171450">
-              <a:spcBef>
-                <a:spcPts val="200"/>
-              </a:spcBef>
+              <a:lnSpc>
+                <a:spcPct val="107000"/>
+              </a:lnSpc>
               <a:spcAft>
-                <a:spcPts val="1000"/>
+                <a:spcPts val="1100"/>
               </a:spcAft>
               <a:buChar char="•"/>
             </a:pPr>
             <a:r>
-              <a:rPr sz="1700" b="0" i="0">
-                <a:solidFill>
-                  <a:srgbClr val="1F2937"/>
-                </a:solidFill>
+              <a:rPr sz="1600" b="0" i="0">
+                <a:solidFill>
+                  <a:srgbClr val="2E3138"/>
+                </a:solidFill>
+                <a:latin typeface="Noto Sans"/>
               </a:rPr>
               <a:t>Semua angka diverifikasi dengan query SQL independen (sql/queries.sql) dan divisualisasikan dalam 10 chart dari data yang sama.</a:t>
             </a:r>
           </a:p>
           <a:p>
             <a:pPr marL="171450" indent="-171450">
-              <a:spcBef>
-                <a:spcPts val="200"/>
-              </a:spcBef>
+              <a:lnSpc>
+                <a:spcPct val="107000"/>
+              </a:lnSpc>
               <a:spcAft>
-                <a:spcPts val="1000"/>
+                <a:spcPts val="1100"/>
               </a:spcAft>
               <a:buChar char="•"/>
             </a:pPr>
             <a:r>
-              <a:rPr sz="1700" b="0" i="0">
-                <a:solidFill>
-                  <a:srgbClr val="1F2937"/>
-                </a:solidFill>
+              <a:rPr sz="1600" b="0" i="0">
+                <a:solidFill>
+                  <a:srgbClr val="2E3138"/>
+                </a:solidFill>
+                <a:latin typeface="Noto Sans"/>
               </a:rPr>
-              <a:t>Pertanyaan utama: TPT nasional 4,65% — tapi siapa sebenarnya 7,22 juta penganggur itu, dan di mana letak masalah terbesarnya?</a:t>
-            </a:r>
-          </a:p>
-        </p:txBody>
-      </p:sp>
-      <p:sp>
-        <p:nvSpPr>
-          <p:cNvPr id="5" name="TextBox 4"/>
+              <a:t>Pertanyaan utama: TPT nasional 4,65%. Tapi siapa sebenarnya 7,22 juta penganggur itu, dan di mana letak masalah terbesarnya?</a:t>
+            </a:r>
+          </a:p>
+        </p:txBody>
+      </p:sp>
+      <p:sp>
+        <p:nvSpPr>
+          <p:cNvPr id="5" name="Rounded Rectangle 4"/>
+          <p:cNvSpPr/>
+          <p:nvPr/>
+        </p:nvSpPr>
+        <p:spPr>
+          <a:xfrm>
+            <a:off x="7543800" y="1389888"/>
+            <a:ext cx="4160520" cy="4041648"/>
+          </a:xfrm>
+          <a:prstGeom prst="roundRect">
+            <a:avLst>
+              <a:gd name="adj" fmla="val 4072"/>
+            </a:avLst>
+          </a:prstGeom>
+          <a:solidFill>
+            <a:srgbClr val="F7F1E5"/>
+          </a:solidFill>
+          <a:ln w="12700">
+            <a:solidFill>
+              <a:srgbClr val="DED2BA"/>
+            </a:solidFill>
+          </a:ln>
+          <a:effectLst/>
+        </p:spPr>
+        <p:style>
+          <a:lnRef idx="1">
+            <a:schemeClr val="accent1"/>
+          </a:lnRef>
+          <a:fillRef idx="3">
+            <a:schemeClr val="accent1"/>
+          </a:fillRef>
+          <a:effectRef idx="2">
+            <a:schemeClr val="accent1"/>
+          </a:effectRef>
+          <a:fontRef idx="minor">
+            <a:schemeClr val="lt1"/>
+          </a:fontRef>
+        </p:style>
+        <p:txBody>
+          <a:bodyPr rtlCol="0" anchor="ctr"/>
+          <a:lstStyle/>
+          <a:p>
+            <a:pPr algn="ctr"/>
+          </a:p>
+        </p:txBody>
+      </p:sp>
+      <p:sp>
+        <p:nvSpPr>
+          <p:cNvPr id="6" name="Rounded Rectangle 5"/>
+          <p:cNvSpPr/>
+          <p:nvPr/>
+        </p:nvSpPr>
+        <p:spPr>
+          <a:xfrm>
+            <a:off x="7626096" y="1472184"/>
+            <a:ext cx="3995928" cy="3877056"/>
+          </a:xfrm>
+          <a:prstGeom prst="roundRect">
+            <a:avLst>
+              <a:gd name="adj" fmla="val 3773"/>
+            </a:avLst>
+          </a:prstGeom>
+          <a:noFill/>
+          <a:ln w="15240">
+            <a:solidFill>
+              <a:srgbClr val="EFC3D2"/>
+            </a:solidFill>
+          </a:ln>
+          <a:effectLst/>
+        </p:spPr>
+        <p:style>
+          <a:lnRef idx="1">
+            <a:schemeClr val="accent1"/>
+          </a:lnRef>
+          <a:fillRef idx="3">
+            <a:schemeClr val="accent1"/>
+          </a:fillRef>
+          <a:effectRef idx="2">
+            <a:schemeClr val="accent1"/>
+          </a:effectRef>
+          <a:fontRef idx="minor">
+            <a:schemeClr val="lt1"/>
+          </a:fontRef>
+        </p:style>
+        <p:txBody>
+          <a:bodyPr rtlCol="0" anchor="ctr"/>
+          <a:lstStyle/>
+          <a:p>
+            <a:pPr algn="ctr"/>
+          </a:p>
+        </p:txBody>
+      </p:sp>
+      <p:sp>
+        <p:nvSpPr>
+          <p:cNvPr id="7" name="TextBox 6"/>
           <p:cNvSpPr txBox="1"/>
           <p:nvPr/>
         </p:nvSpPr>
         <p:spPr>
           <a:xfrm>
-            <a:off x="640080" y="6126480"/>
-            <a:ext cx="10881360" cy="457200"/>
+            <a:off x="7882127" y="1700784"/>
+            <a:ext cx="1143000" cy="685800"/>
           </a:xfrm>
           <a:prstGeom prst="rect">
             <a:avLst/>
@@ -3701,21 +4704,369 @@
           <a:noFill/>
         </p:spPr>
         <p:txBody>
-          <a:bodyPr wrap="square">
+          <a:bodyPr wrap="square" lIns="0" rIns="0" tIns="0" bIns="0">
             <a:spAutoFit/>
           </a:bodyPr>
           <a:lstStyle/>
           <a:p>
             <a:pPr>
+              <a:lnSpc>
+                <a:spcPct val="107000"/>
+              </a:lnSpc>
               <a:spcAft>
                 <a:spcPts val="800"/>
               </a:spcAft>
             </a:pPr>
             <a:r>
+              <a:rPr sz="3200" b="1" i="0">
+                <a:solidFill>
+                  <a:srgbClr val="4E7FA6"/>
+                </a:solidFill>
+                <a:latin typeface="Noto Sans"/>
+              </a:rPr>
+              <a:t>5</a:t>
+            </a:r>
+          </a:p>
+        </p:txBody>
+      </p:sp>
+      <p:sp>
+        <p:nvSpPr>
+          <p:cNvPr id="8" name="TextBox 7"/>
+          <p:cNvSpPr txBox="1"/>
+          <p:nvPr/>
+        </p:nvSpPr>
+        <p:spPr>
+          <a:xfrm>
+            <a:off x="8979408" y="1792224"/>
+            <a:ext cx="2560320" cy="868680"/>
+          </a:xfrm>
+          <a:prstGeom prst="rect">
+            <a:avLst/>
+          </a:prstGeom>
+          <a:noFill/>
+        </p:spPr>
+        <p:txBody>
+          <a:bodyPr wrap="square" lIns="0" rIns="0" tIns="0" bIns="0">
+            <a:spAutoFit/>
+          </a:bodyPr>
+          <a:lstStyle/>
+          <a:p>
+            <a:pPr>
+              <a:lnSpc>
+                <a:spcPct val="107000"/>
+              </a:lnSpc>
+              <a:spcAft>
+                <a:spcPts val="800"/>
+              </a:spcAft>
+            </a:pPr>
+            <a:r>
+              <a:rPr sz="1300" b="0" i="0">
+                <a:solidFill>
+                  <a:srgbClr val="2E3138"/>
+                </a:solidFill>
+                <a:latin typeface="Noto Sans"/>
+              </a:rPr>
+              <a:t>titik waktu Sakernas diamati</a:t>
+            </a:r>
+          </a:p>
+        </p:txBody>
+      </p:sp>
+      <p:sp>
+        <p:nvSpPr>
+          <p:cNvPr id="9" name="Rounded Rectangle 8"/>
+          <p:cNvSpPr/>
+          <p:nvPr/>
+        </p:nvSpPr>
+        <p:spPr>
+          <a:xfrm>
+            <a:off x="7882127" y="2633472"/>
+            <a:ext cx="3520440" cy="20116"/>
+          </a:xfrm>
+          <a:prstGeom prst="roundRect">
+            <a:avLst>
+              <a:gd name="adj" fmla="val 50000"/>
+            </a:avLst>
+          </a:prstGeom>
+          <a:solidFill>
+            <a:srgbClr val="DED2BA"/>
+          </a:solidFill>
+          <a:ln>
+            <a:noFill/>
+          </a:ln>
+          <a:effectLst/>
+        </p:spPr>
+        <p:style>
+          <a:lnRef idx="1">
+            <a:schemeClr val="accent1"/>
+          </a:lnRef>
+          <a:fillRef idx="3">
+            <a:schemeClr val="accent1"/>
+          </a:fillRef>
+          <a:effectRef idx="2">
+            <a:schemeClr val="accent1"/>
+          </a:effectRef>
+          <a:fontRef idx="minor">
+            <a:schemeClr val="lt1"/>
+          </a:fontRef>
+        </p:style>
+        <p:txBody>
+          <a:bodyPr rtlCol="0" anchor="ctr"/>
+          <a:lstStyle/>
+          <a:p>
+            <a:pPr algn="ctr"/>
+          </a:p>
+        </p:txBody>
+      </p:sp>
+      <p:sp>
+        <p:nvSpPr>
+          <p:cNvPr id="10" name="TextBox 9"/>
+          <p:cNvSpPr txBox="1"/>
+          <p:nvPr/>
+        </p:nvSpPr>
+        <p:spPr>
+          <a:xfrm>
+            <a:off x="7882127" y="2962656"/>
+            <a:ext cx="1143000" cy="685800"/>
+          </a:xfrm>
+          <a:prstGeom prst="rect">
+            <a:avLst/>
+          </a:prstGeom>
+          <a:noFill/>
+        </p:spPr>
+        <p:txBody>
+          <a:bodyPr wrap="square" lIns="0" rIns="0" tIns="0" bIns="0">
+            <a:spAutoFit/>
+          </a:bodyPr>
+          <a:lstStyle/>
+          <a:p>
+            <a:pPr>
+              <a:lnSpc>
+                <a:spcPct val="107000"/>
+              </a:lnSpc>
+              <a:spcAft>
+                <a:spcPts val="800"/>
+              </a:spcAft>
+            </a:pPr>
+            <a:r>
+              <a:rPr sz="3200" b="1" i="0">
+                <a:solidFill>
+                  <a:srgbClr val="4E7FA6"/>
+                </a:solidFill>
+                <a:latin typeface="Noto Sans"/>
+              </a:rPr>
+              <a:t>38</a:t>
+            </a:r>
+          </a:p>
+        </p:txBody>
+      </p:sp>
+      <p:sp>
+        <p:nvSpPr>
+          <p:cNvPr id="11" name="TextBox 10"/>
+          <p:cNvSpPr txBox="1"/>
+          <p:nvPr/>
+        </p:nvSpPr>
+        <p:spPr>
+          <a:xfrm>
+            <a:off x="8979408" y="3054096"/>
+            <a:ext cx="2560320" cy="868680"/>
+          </a:xfrm>
+          <a:prstGeom prst="rect">
+            <a:avLst/>
+          </a:prstGeom>
+          <a:noFill/>
+        </p:spPr>
+        <p:txBody>
+          <a:bodyPr wrap="square" lIns="0" rIns="0" tIns="0" bIns="0">
+            <a:spAutoFit/>
+          </a:bodyPr>
+          <a:lstStyle/>
+          <a:p>
+            <a:pPr>
+              <a:lnSpc>
+                <a:spcPct val="107000"/>
+              </a:lnSpc>
+              <a:spcAft>
+                <a:spcPts val="800"/>
+              </a:spcAft>
+            </a:pPr>
+            <a:r>
+              <a:rPr sz="1300" b="0" i="0">
+                <a:solidFill>
+                  <a:srgbClr val="2E3138"/>
+                </a:solidFill>
+                <a:latin typeface="Noto Sans"/>
+              </a:rPr>
+              <a:t>provinsi dalam kompilasi BPS</a:t>
+            </a:r>
+          </a:p>
+        </p:txBody>
+      </p:sp>
+      <p:sp>
+        <p:nvSpPr>
+          <p:cNvPr id="12" name="Rounded Rectangle 11"/>
+          <p:cNvSpPr/>
+          <p:nvPr/>
+        </p:nvSpPr>
+        <p:spPr>
+          <a:xfrm>
+            <a:off x="7882127" y="3895344"/>
+            <a:ext cx="3520440" cy="20116"/>
+          </a:xfrm>
+          <a:prstGeom prst="roundRect">
+            <a:avLst>
+              <a:gd name="adj" fmla="val 50000"/>
+            </a:avLst>
+          </a:prstGeom>
+          <a:solidFill>
+            <a:srgbClr val="DED2BA"/>
+          </a:solidFill>
+          <a:ln>
+            <a:noFill/>
+          </a:ln>
+          <a:effectLst/>
+        </p:spPr>
+        <p:style>
+          <a:lnRef idx="1">
+            <a:schemeClr val="accent1"/>
+          </a:lnRef>
+          <a:fillRef idx="3">
+            <a:schemeClr val="accent1"/>
+          </a:fillRef>
+          <a:effectRef idx="2">
+            <a:schemeClr val="accent1"/>
+          </a:effectRef>
+          <a:fontRef idx="minor">
+            <a:schemeClr val="lt1"/>
+          </a:fontRef>
+        </p:style>
+        <p:txBody>
+          <a:bodyPr rtlCol="0" anchor="ctr"/>
+          <a:lstStyle/>
+          <a:p>
+            <a:pPr algn="ctr"/>
+          </a:p>
+        </p:txBody>
+      </p:sp>
+      <p:sp>
+        <p:nvSpPr>
+          <p:cNvPr id="13" name="TextBox 12"/>
+          <p:cNvSpPr txBox="1"/>
+          <p:nvPr/>
+        </p:nvSpPr>
+        <p:spPr>
+          <a:xfrm>
+            <a:off x="7882127" y="4224528"/>
+            <a:ext cx="1143000" cy="685800"/>
+          </a:xfrm>
+          <a:prstGeom prst="rect">
+            <a:avLst/>
+          </a:prstGeom>
+          <a:noFill/>
+        </p:spPr>
+        <p:txBody>
+          <a:bodyPr wrap="square" lIns="0" rIns="0" tIns="0" bIns="0">
+            <a:spAutoFit/>
+          </a:bodyPr>
+          <a:lstStyle/>
+          <a:p>
+            <a:pPr>
+              <a:lnSpc>
+                <a:spcPct val="107000"/>
+              </a:lnSpc>
+              <a:spcAft>
+                <a:spcPts val="800"/>
+              </a:spcAft>
+            </a:pPr>
+            <a:r>
+              <a:rPr sz="3200" b="1" i="0">
+                <a:solidFill>
+                  <a:srgbClr val="4E7FA6"/>
+                </a:solidFill>
+                <a:latin typeface="Noto Sans"/>
+              </a:rPr>
+              <a:t>10</a:t>
+            </a:r>
+          </a:p>
+        </p:txBody>
+      </p:sp>
+      <p:sp>
+        <p:nvSpPr>
+          <p:cNvPr id="14" name="TextBox 13"/>
+          <p:cNvSpPr txBox="1"/>
+          <p:nvPr/>
+        </p:nvSpPr>
+        <p:spPr>
+          <a:xfrm>
+            <a:off x="8979408" y="4315968"/>
+            <a:ext cx="2560320" cy="868680"/>
+          </a:xfrm>
+          <a:prstGeom prst="rect">
+            <a:avLst/>
+          </a:prstGeom>
+          <a:noFill/>
+        </p:spPr>
+        <p:txBody>
+          <a:bodyPr wrap="square" lIns="0" rIns="0" tIns="0" bIns="0">
+            <a:spAutoFit/>
+          </a:bodyPr>
+          <a:lstStyle/>
+          <a:p>
+            <a:pPr>
+              <a:lnSpc>
+                <a:spcPct val="107000"/>
+              </a:lnSpc>
+              <a:spcAft>
+                <a:spcPts val="800"/>
+              </a:spcAft>
+            </a:pPr>
+            <a:r>
+              <a:rPr sz="1300" b="0" i="0">
+                <a:solidFill>
+                  <a:srgbClr val="2E3138"/>
+                </a:solidFill>
+                <a:latin typeface="Noto Sans"/>
+              </a:rPr>
+              <a:t>chart dari data yang sama</a:t>
+            </a:r>
+          </a:p>
+        </p:txBody>
+      </p:sp>
+      <p:sp>
+        <p:nvSpPr>
+          <p:cNvPr id="15" name="TextBox 14"/>
+          <p:cNvSpPr txBox="1"/>
+          <p:nvPr/>
+        </p:nvSpPr>
+        <p:spPr>
+          <a:xfrm>
+            <a:off x="502920" y="6382512"/>
+            <a:ext cx="11155680" cy="365760"/>
+          </a:xfrm>
+          <a:prstGeom prst="rect">
+            <a:avLst/>
+          </a:prstGeom>
+          <a:noFill/>
+        </p:spPr>
+        <p:txBody>
+          <a:bodyPr wrap="square" lIns="0" rIns="0" tIns="0" bIns="0">
+            <a:spAutoFit/>
+          </a:bodyPr>
+          <a:lstStyle/>
+          <a:p>
+            <a:pPr>
+              <a:lnSpc>
+                <a:spcPct val="107000"/>
+              </a:lnSpc>
+              <a:spcAft>
+                <a:spcPts val="800"/>
+              </a:spcAft>
+            </a:pPr>
+            <a:r>
               <a:rPr sz="1100" b="0" i="1">
                 <a:solidFill>
-                  <a:srgbClr val="6B7280"/>
-                </a:solidFill>
+                  <a:srgbClr val="5F5B4F"/>
+                </a:solidFill>
+                <a:latin typeface="Noto Sans"/>
               </a:rPr>
               <a:t>Sumber: BPS, Survei Angkatan Kerja Nasional (Sakernas). Daftar sumber per angka: data/SOURCES.md.</a:t>
             </a:r>
@@ -3736,7 +5087,7 @@
     <p:bg>
       <p:bgPr>
         <a:solidFill>
-          <a:srgbClr val="FFFFFF"/>
+          <a:srgbClr val="EFE7D8"/>
         </a:solidFill>
         <a:effectLst/>
       </p:bgPr>
@@ -3756,8 +5107,8 @@
         </p:nvSpPr>
         <p:spPr>
           <a:xfrm>
-            <a:off x="640080" y="274320"/>
-            <a:ext cx="10881360" cy="822960"/>
+            <a:off x="502920" y="274320"/>
+            <a:ext cx="11155680" cy="777240"/>
           </a:xfrm>
           <a:prstGeom prst="rect">
             <a:avLst/>
@@ -3765,21 +5116,25 @@
           <a:noFill/>
         </p:spPr>
         <p:txBody>
-          <a:bodyPr wrap="square">
+          <a:bodyPr wrap="square" lIns="0" rIns="0" tIns="0" bIns="0">
             <a:spAutoFit/>
           </a:bodyPr>
           <a:lstStyle/>
           <a:p>
             <a:pPr>
+              <a:lnSpc>
+                <a:spcPct val="107000"/>
+              </a:lnSpc>
               <a:spcAft>
                 <a:spcPts val="800"/>
               </a:spcAft>
             </a:pPr>
             <a:r>
-              <a:rPr sz="3000" b="1" i="0">
-                <a:solidFill>
-                  <a:srgbClr val="1E3A8A"/>
-                </a:solidFill>
+              <a:rPr sz="3100" b="1" i="0">
+                <a:solidFill>
+                  <a:srgbClr val="2E3138"/>
+                </a:solidFill>
+                <a:latin typeface="Noto Sans"/>
               </a:rPr>
               <a:t>TPT Nasional Turun, Ekonomi Tetap Tumbuh</a:t>
             </a:r>
@@ -3788,24 +5143,27 @@
       </p:sp>
       <p:sp>
         <p:nvSpPr>
-          <p:cNvPr id="3" name="Rectangle 2"/>
+          <p:cNvPr id="3" name="Rounded Rectangle 2"/>
           <p:cNvSpPr/>
           <p:nvPr/>
         </p:nvSpPr>
         <p:spPr>
           <a:xfrm>
-            <a:off x="640080" y="1051560"/>
-            <a:ext cx="1371600" cy="54864"/>
-          </a:xfrm>
-          <a:prstGeom prst="rect">
-            <a:avLst/>
+            <a:off x="521207" y="1042415"/>
+            <a:ext cx="566928" cy="82296"/>
+          </a:xfrm>
+          <a:prstGeom prst="roundRect">
+            <a:avLst>
+              <a:gd name="adj" fmla="val 50000"/>
+            </a:avLst>
           </a:prstGeom>
           <a:solidFill>
-            <a:srgbClr val="0D9488"/>
+            <a:srgbClr val="C75B7F"/>
           </a:solidFill>
           <a:ln>
             <a:noFill/>
           </a:ln>
+          <a:effectLst/>
         </p:spPr>
         <p:style>
           <a:lnRef idx="1">
@@ -3837,8 +5195,8 @@
         </p:nvSpPr>
         <p:spPr>
           <a:xfrm>
-            <a:off x="640080" y="1371600"/>
-            <a:ext cx="5120640" cy="4754880"/>
+            <a:off x="502920" y="1389888"/>
+            <a:ext cx="5349240" cy="4846320"/>
           </a:xfrm>
           <a:prstGeom prst="rect">
             <a:avLst/>
@@ -3846,91 +5204,143 @@
           <a:noFill/>
         </p:spPr>
         <p:txBody>
-          <a:bodyPr wrap="square">
+          <a:bodyPr wrap="square" lIns="0" rIns="0" tIns="0" bIns="0">
             <a:spAutoFit/>
           </a:bodyPr>
           <a:lstStyle/>
           <a:p>
             <a:pPr marL="171450" indent="-171450">
-              <a:spcBef>
-                <a:spcPts val="200"/>
-              </a:spcBef>
+              <a:lnSpc>
+                <a:spcPct val="107000"/>
+              </a:lnSpc>
               <a:spcAft>
-                <a:spcPts val="1000"/>
+                <a:spcPts val="1100"/>
               </a:spcAft>
               <a:buChar char="•"/>
             </a:pPr>
             <a:r>
-              <a:rPr sz="1700" b="0" i="0">
-                <a:solidFill>
-                  <a:srgbClr val="1F2937"/>
-                </a:solidFill>
+              <a:rPr sz="1600" b="0" i="0">
+                <a:solidFill>
+                  <a:srgbClr val="2E3138"/>
+                </a:solidFill>
+                <a:latin typeface="Noto Sans"/>
               </a:rPr>
-              <a:t>TPT nasional turun dari 4,82% (Feb 2024) ke 4,65% (Mei 2026) — penurunan 0,17 poin persen dalam 27 bulan.</a:t>
+              <a:t>TPT nasional turun dari 4,82% (Feb 2024) ke 4,65% (Mei 2026), penurunan 0,17 poin persen dalam 27 bulan.</a:t>
             </a:r>
           </a:p>
           <a:p>
             <a:pPr marL="171450" indent="-171450">
-              <a:spcBef>
-                <a:spcPts val="200"/>
-              </a:spcBef>
+              <a:lnSpc>
+                <a:spcPct val="107000"/>
+              </a:lnSpc>
               <a:spcAft>
-                <a:spcPts val="1000"/>
+                <a:spcPts val="1100"/>
               </a:spcAft>
               <a:buChar char="•"/>
             </a:pPr>
             <a:r>
-              <a:rPr sz="1700" b="0" i="0">
-                <a:solidFill>
-                  <a:srgbClr val="1F2937"/>
-                </a:solidFill>
+              <a:rPr sz="1600" b="0" i="0">
+                <a:solidFill>
+                  <a:srgbClr val="2E3138"/>
+                </a:solidFill>
+                <a:latin typeface="Noto Sans"/>
               </a:rPr>
               <a:t>Penganggur Mei 2026: 7,22 jt orang dari angkatan kerja 155,41 jt; yang bekerja 148,19 jt. TPAK 70,57%.</a:t>
             </a:r>
           </a:p>
           <a:p>
             <a:pPr marL="171450" indent="-171450">
-              <a:spcBef>
-                <a:spcPts val="200"/>
-              </a:spcBef>
+              <a:lnSpc>
+                <a:spcPct val="107000"/>
+              </a:lnSpc>
               <a:spcAft>
-                <a:spcPts val="1000"/>
+                <a:spcPts val="1100"/>
               </a:spcAft>
               <a:buChar char="•"/>
             </a:pPr>
             <a:r>
-              <a:rPr sz="1700" b="0" i="0">
-                <a:solidFill>
-                  <a:srgbClr val="1F2937"/>
-                </a:solidFill>
+              <a:rPr sz="1600" b="0" i="0">
+                <a:solidFill>
+                  <a:srgbClr val="2E3138"/>
+                </a:solidFill>
+                <a:latin typeface="Noto Sans"/>
               </a:rPr>
               <a:t>Di saat yang sama, ekonomi tumbuh: PDB Q2 2026 tumbuh 5,29% secara tahunan. Penurunan TPT berjalan seiring pertumbuhan ekonomi.</a:t>
             </a:r>
           </a:p>
           <a:p>
             <a:pPr marL="171450" indent="-171450">
-              <a:spcBef>
-                <a:spcPts val="200"/>
-              </a:spcBef>
+              <a:lnSpc>
+                <a:spcPct val="107000"/>
+              </a:lnSpc>
               <a:spcAft>
-                <a:spcPts val="1000"/>
+                <a:spcPts val="1100"/>
               </a:spcAft>
               <a:buChar char="•"/>
             </a:pPr>
             <a:r>
-              <a:rPr sz="1700" b="0" i="0">
-                <a:solidFill>
-                  <a:srgbClr val="1F2937"/>
-                </a:solidFill>
+              <a:rPr sz="1600" b="0" i="0">
+                <a:solidFill>
+                  <a:srgbClr val="2E3138"/>
+                </a:solidFill>
+                <a:latin typeface="Noto Sans"/>
               </a:rPr>
-              <a:t>Tapi tren nasional saja tidak cukup — masalah sesungguhnya ada di rinciannya.</a:t>
-            </a:r>
+              <a:t>Tapi tren nasional saja tidak cukup, masalah sesungguhnya ada di rinciannya.</a:t>
+            </a:r>
+          </a:p>
+        </p:txBody>
+      </p:sp>
+      <p:sp>
+        <p:nvSpPr>
+          <p:cNvPr id="5" name="Rounded Rectangle 4"/>
+          <p:cNvSpPr/>
+          <p:nvPr/>
+        </p:nvSpPr>
+        <p:spPr>
+          <a:xfrm>
+            <a:off x="6126480" y="1353312"/>
+            <a:ext cx="5577840" cy="3566160"/>
+          </a:xfrm>
+          <a:prstGeom prst="roundRect">
+            <a:avLst>
+              <a:gd name="adj" fmla="val 4102"/>
+            </a:avLst>
+          </a:prstGeom>
+          <a:solidFill>
+            <a:srgbClr val="F7F1E5"/>
+          </a:solidFill>
+          <a:ln w="12700">
+            <a:solidFill>
+              <a:srgbClr val="DED2BA"/>
+            </a:solidFill>
+          </a:ln>
+          <a:effectLst/>
+        </p:spPr>
+        <p:style>
+          <a:lnRef idx="1">
+            <a:schemeClr val="accent1"/>
+          </a:lnRef>
+          <a:fillRef idx="3">
+            <a:schemeClr val="accent1"/>
+          </a:fillRef>
+          <a:effectRef idx="2">
+            <a:schemeClr val="accent1"/>
+          </a:effectRef>
+          <a:fontRef idx="minor">
+            <a:schemeClr val="lt1"/>
+          </a:fontRef>
+        </p:style>
+        <p:txBody>
+          <a:bodyPr rtlCol="0" anchor="ctr"/>
+          <a:lstStyle/>
+          <a:p>
+            <a:pPr algn="ctr"/>
           </a:p>
         </p:txBody>
       </p:sp>
       <p:pic>
         <p:nvPicPr>
-          <p:cNvPr id="5" name="Picture 4" descr="01_tpt_nasional_tren.png"/>
+          <p:cNvPr id="6" name="Picture 5" descr="01_tpt_nasional_tren.png"/>
           <p:cNvPicPr>
             <a:picLocks noChangeAspect="1"/>
           </p:cNvPicPr>
@@ -3944,14 +5354,190 @@
         </p:blipFill>
         <p:spPr>
           <a:xfrm>
-            <a:off x="6217920" y="1371600"/>
-            <a:ext cx="5303520" cy="2886635"/>
+            <a:off x="6291072" y="1709351"/>
+            <a:ext cx="5248655" cy="2854081"/>
           </a:xfrm>
           <a:prstGeom prst="rect">
             <a:avLst/>
           </a:prstGeom>
         </p:spPr>
       </p:pic>
+      <p:sp>
+        <p:nvSpPr>
+          <p:cNvPr id="7" name="Rounded Rectangle 6"/>
+          <p:cNvSpPr/>
+          <p:nvPr/>
+        </p:nvSpPr>
+        <p:spPr>
+          <a:xfrm>
+            <a:off x="6126480" y="5138928"/>
+            <a:ext cx="2606040" cy="502920"/>
+          </a:xfrm>
+          <a:prstGeom prst="roundRect">
+            <a:avLst>
+              <a:gd name="adj" fmla="val 50000"/>
+            </a:avLst>
+          </a:prstGeom>
+          <a:solidFill>
+            <a:srgbClr val="4E7FA6"/>
+          </a:solidFill>
+          <a:ln>
+            <a:noFill/>
+          </a:ln>
+          <a:effectLst/>
+        </p:spPr>
+        <p:style>
+          <a:lnRef idx="1">
+            <a:schemeClr val="accent1"/>
+          </a:lnRef>
+          <a:fillRef idx="3">
+            <a:schemeClr val="accent1"/>
+          </a:fillRef>
+          <a:effectRef idx="2">
+            <a:schemeClr val="accent1"/>
+          </a:effectRef>
+          <a:fontRef idx="minor">
+            <a:schemeClr val="lt1"/>
+          </a:fontRef>
+        </p:style>
+        <p:txBody>
+          <a:bodyPr rtlCol="0" anchor="ctr"/>
+          <a:lstStyle/>
+          <a:p>
+            <a:pPr algn="ctr"/>
+          </a:p>
+        </p:txBody>
+      </p:sp>
+      <p:sp>
+        <p:nvSpPr>
+          <p:cNvPr id="8" name="TextBox 7"/>
+          <p:cNvSpPr txBox="1"/>
+          <p:nvPr/>
+        </p:nvSpPr>
+        <p:spPr>
+          <a:xfrm>
+            <a:off x="6172200" y="5138928"/>
+            <a:ext cx="2514600" cy="502920"/>
+          </a:xfrm>
+          <a:prstGeom prst="rect">
+            <a:avLst/>
+          </a:prstGeom>
+          <a:noFill/>
+        </p:spPr>
+        <p:txBody>
+          <a:bodyPr wrap="square" lIns="0" rIns="0" tIns="0" bIns="0" anchor="ctr">
+            <a:spAutoFit/>
+          </a:bodyPr>
+          <a:lstStyle/>
+          <a:p>
+            <a:pPr algn="ctr">
+              <a:lnSpc>
+                <a:spcPct val="107000"/>
+              </a:lnSpc>
+              <a:spcAft>
+                <a:spcPts val="0"/>
+              </a:spcAft>
+            </a:pPr>
+            <a:r>
+              <a:rPr sz="1250" b="1" i="0">
+                <a:solidFill>
+                  <a:srgbClr val="FFFFFF"/>
+                </a:solidFill>
+                <a:latin typeface="Noto Sans"/>
+              </a:rPr>
+              <a:t>TPT Mei 2026: 4,65%</a:t>
+            </a:r>
+          </a:p>
+        </p:txBody>
+      </p:sp>
+      <p:sp>
+        <p:nvSpPr>
+          <p:cNvPr id="9" name="Rounded Rectangle 8"/>
+          <p:cNvSpPr/>
+          <p:nvPr/>
+        </p:nvSpPr>
+        <p:spPr>
+          <a:xfrm>
+            <a:off x="8869680" y="5138928"/>
+            <a:ext cx="2834640" cy="502920"/>
+          </a:xfrm>
+          <a:prstGeom prst="roundRect">
+            <a:avLst>
+              <a:gd name="adj" fmla="val 50000"/>
+            </a:avLst>
+          </a:prstGeom>
+          <a:solidFill>
+            <a:srgbClr val="EFC3D2"/>
+          </a:solidFill>
+          <a:ln>
+            <a:noFill/>
+          </a:ln>
+          <a:effectLst/>
+        </p:spPr>
+        <p:style>
+          <a:lnRef idx="1">
+            <a:schemeClr val="accent1"/>
+          </a:lnRef>
+          <a:fillRef idx="3">
+            <a:schemeClr val="accent1"/>
+          </a:fillRef>
+          <a:effectRef idx="2">
+            <a:schemeClr val="accent1"/>
+          </a:effectRef>
+          <a:fontRef idx="minor">
+            <a:schemeClr val="lt1"/>
+          </a:fontRef>
+        </p:style>
+        <p:txBody>
+          <a:bodyPr rtlCol="0" anchor="ctr"/>
+          <a:lstStyle/>
+          <a:p>
+            <a:pPr algn="ctr"/>
+          </a:p>
+        </p:txBody>
+      </p:sp>
+      <p:sp>
+        <p:nvSpPr>
+          <p:cNvPr id="10" name="TextBox 9"/>
+          <p:cNvSpPr txBox="1"/>
+          <p:nvPr/>
+        </p:nvSpPr>
+        <p:spPr>
+          <a:xfrm>
+            <a:off x="8915400" y="5138928"/>
+            <a:ext cx="2743200" cy="502920"/>
+          </a:xfrm>
+          <a:prstGeom prst="rect">
+            <a:avLst/>
+          </a:prstGeom>
+          <a:noFill/>
+        </p:spPr>
+        <p:txBody>
+          <a:bodyPr wrap="square" lIns="0" rIns="0" tIns="0" bIns="0" anchor="ctr">
+            <a:spAutoFit/>
+          </a:bodyPr>
+          <a:lstStyle/>
+          <a:p>
+            <a:pPr algn="ctr">
+              <a:lnSpc>
+                <a:spcPct val="107000"/>
+              </a:lnSpc>
+              <a:spcAft>
+                <a:spcPts val="0"/>
+              </a:spcAft>
+            </a:pPr>
+            <a:r>
+              <a:rPr sz="1250" b="1" i="0">
+                <a:solidFill>
+                  <a:srgbClr val="2E3138"/>
+                </a:solidFill>
+                <a:latin typeface="Noto Sans"/>
+              </a:rPr>
+              <a:t>Penganggur: 7,22 jt orang</a:t>
+            </a:r>
+          </a:p>
+        </p:txBody>
+      </p:sp>
     </p:spTree>
   </p:cSld>
   <p:clrMapOvr>
@@ -3966,7 +5552,7 @@
     <p:bg>
       <p:bgPr>
         <a:solidFill>
-          <a:srgbClr val="FFFFFF"/>
+          <a:srgbClr val="EFE7D8"/>
         </a:solidFill>
         <a:effectLst/>
       </p:bgPr>
@@ -3986,8 +5572,8 @@
         </p:nvSpPr>
         <p:spPr>
           <a:xfrm>
-            <a:off x="640080" y="274320"/>
-            <a:ext cx="10881360" cy="822960"/>
+            <a:off x="502920" y="274320"/>
+            <a:ext cx="11155680" cy="777240"/>
           </a:xfrm>
           <a:prstGeom prst="rect">
             <a:avLst/>
@@ -3995,21 +5581,25 @@
           <a:noFill/>
         </p:spPr>
         <p:txBody>
-          <a:bodyPr wrap="square">
+          <a:bodyPr wrap="square" lIns="0" rIns="0" tIns="0" bIns="0">
             <a:spAutoFit/>
           </a:bodyPr>
           <a:lstStyle/>
           <a:p>
             <a:pPr>
+              <a:lnSpc>
+                <a:spcPct val="107000"/>
+              </a:lnSpc>
               <a:spcAft>
                 <a:spcPts val="800"/>
               </a:spcAft>
             </a:pPr>
             <a:r>
-              <a:rPr sz="3000" b="1" i="0">
-                <a:solidFill>
-                  <a:srgbClr val="1E3A8A"/>
-                </a:solidFill>
+              <a:rPr sz="3100" b="1" i="0">
+                <a:solidFill>
+                  <a:srgbClr val="2E3138"/>
+                </a:solidFill>
+                <a:latin typeface="Noto Sans"/>
               </a:rPr>
               <a:t>Paradoks Pendidikan: Makin Tinggi Ijazah, Makin Sulit?</a:t>
             </a:r>
@@ -4018,24 +5608,27 @@
       </p:sp>
       <p:sp>
         <p:nvSpPr>
-          <p:cNvPr id="3" name="Rectangle 2"/>
+          <p:cNvPr id="3" name="Rounded Rectangle 2"/>
           <p:cNvSpPr/>
           <p:nvPr/>
         </p:nvSpPr>
         <p:spPr>
           <a:xfrm>
-            <a:off x="640080" y="1051560"/>
-            <a:ext cx="1371600" cy="54864"/>
-          </a:xfrm>
-          <a:prstGeom prst="rect">
-            <a:avLst/>
+            <a:off x="521207" y="1042415"/>
+            <a:ext cx="566928" cy="82296"/>
+          </a:xfrm>
+          <a:prstGeom prst="roundRect">
+            <a:avLst>
+              <a:gd name="adj" fmla="val 50000"/>
+            </a:avLst>
           </a:prstGeom>
           <a:solidFill>
-            <a:srgbClr val="0D9488"/>
+            <a:srgbClr val="C75B7F"/>
           </a:solidFill>
           <a:ln>
             <a:noFill/>
           </a:ln>
+          <a:effectLst/>
         </p:spPr>
         <p:style>
           <a:lnRef idx="1">
@@ -4067,8 +5660,8 @@
         </p:nvSpPr>
         <p:spPr>
           <a:xfrm>
-            <a:off x="640080" y="1371600"/>
-            <a:ext cx="5120640" cy="4754880"/>
+            <a:off x="502920" y="1389888"/>
+            <a:ext cx="5349240" cy="4846320"/>
           </a:xfrm>
           <a:prstGeom prst="rect">
             <a:avLst/>
@@ -4076,91 +5669,275 @@
           <a:noFill/>
         </p:spPr>
         <p:txBody>
-          <a:bodyPr wrap="square">
+          <a:bodyPr wrap="square" lIns="0" rIns="0" tIns="0" bIns="0">
             <a:spAutoFit/>
           </a:bodyPr>
           <a:lstStyle/>
           <a:p>
             <a:pPr marL="171450" indent="-171450">
-              <a:spcBef>
-                <a:spcPts val="200"/>
-              </a:spcBef>
+              <a:lnSpc>
+                <a:spcPct val="107000"/>
+              </a:lnSpc>
               <a:spcAft>
-                <a:spcPts val="1000"/>
+                <a:spcPts val="1100"/>
               </a:spcAft>
               <a:buChar char="•"/>
             </a:pPr>
             <a:r>
-              <a:rPr sz="1700" b="0" i="0">
-                <a:solidFill>
-                  <a:srgbClr val="1F2937"/>
-                </a:solidFill>
+              <a:rPr sz="1600" b="0" i="0">
+                <a:solidFill>
+                  <a:srgbClr val="2E3138"/>
+                </a:solidFill>
+                <a:latin typeface="Noto Sans"/>
               </a:rPr>
-              <a:t>Lulusan SMK punya TPT 7,68% — tertinggi di antara semua jenjang pendidikan. Lulusan SD ke bawah hanya 2,31%.</a:t>
+              <a:t>Lulusan SMK punya TPT 7,68%, tertinggi di antara semua jenjang pendidikan. Lulusan SD ke bawah hanya 2,31%.</a:t>
             </a:r>
           </a:p>
           <a:p>
             <a:pPr marL="171450" indent="-171450">
-              <a:spcBef>
-                <a:spcPts val="200"/>
-              </a:spcBef>
+              <a:lnSpc>
+                <a:spcPct val="107000"/>
+              </a:lnSpc>
               <a:spcAft>
-                <a:spcPts val="1000"/>
+                <a:spcPts val="1100"/>
               </a:spcAft>
               <a:buChar char="•"/>
             </a:pPr>
             <a:r>
-              <a:rPr sz="1700" b="0" i="0">
-                <a:solidFill>
-                  <a:srgbClr val="1F2937"/>
-                </a:solidFill>
+              <a:rPr sz="1600" b="0" i="0">
+                <a:solidFill>
+                  <a:srgbClr val="2E3138"/>
+                </a:solidFill>
+                <a:latin typeface="Noto Sans"/>
               </a:rPr>
               <a:t>Selisihnya 5,37 poin persen; TPT SMK 1,65 kali lipat rata-rata nasional. Paradoks: jenjang paling rendah pendidikannya justru paling mudah mendapat pekerjaan.</a:t>
             </a:r>
           </a:p>
           <a:p>
             <a:pPr marL="171450" indent="-171450">
-              <a:spcBef>
-                <a:spcPts val="200"/>
-              </a:spcBef>
+              <a:lnSpc>
+                <a:spcPct val="107000"/>
+              </a:lnSpc>
               <a:spcAft>
-                <a:spcPts val="1000"/>
+                <a:spcPts val="1100"/>
               </a:spcAft>
               <a:buChar char="•"/>
             </a:pPr>
             <a:r>
-              <a:rPr sz="1700" b="0" i="0">
-                <a:solidFill>
-                  <a:srgbClr val="1F2937"/>
-                </a:solidFill>
+              <a:rPr sz="1600" b="0" i="0">
+                <a:solidFill>
+                  <a:srgbClr val="2E3138"/>
+                </a:solidFill>
+                <a:latin typeface="Noto Sans"/>
               </a:rPr>
-              <a:t>Lulusan universitas (Diploma IV/S1/S2/S3) juga tinggi: 6,09% — lebih tinggi dari lulusan SMP. Pasar kerja tidak menyerap sesuai ijazah.</a:t>
+              <a:t>Lulusan universitas (Diploma IV/S1/S2/S3) juga tinggi: 6,09%, lebih tinggi dari lulusan SMP. Pasar kerja tidak menyerap sesuai ijazah.</a:t>
             </a:r>
           </a:p>
           <a:p>
             <a:pPr marL="171450" indent="-171450">
-              <a:spcBef>
-                <a:spcPts val="200"/>
-              </a:spcBef>
+              <a:lnSpc>
+                <a:spcPct val="107000"/>
+              </a:lnSpc>
               <a:spcAft>
-                <a:spcPts val="1000"/>
+                <a:spcPts val="1100"/>
               </a:spcAft>
               <a:buChar char="•"/>
             </a:pPr>
             <a:r>
-              <a:rPr sz="1700" b="0" i="0">
-                <a:solidFill>
-                  <a:srgbClr val="1F2937"/>
-                </a:solidFill>
+              <a:rPr sz="1600" b="0" i="0">
+                <a:solidFill>
+                  <a:srgbClr val="2E3138"/>
+                </a:solidFill>
+                <a:latin typeface="Noto Sans"/>
               </a:rPr>
               <a:t>Inilah fokus utama analisis ini: ketidakcocokan antara pendidikan dan lapangan kerja yang tersedia.</a:t>
             </a:r>
           </a:p>
         </p:txBody>
       </p:sp>
+      <p:sp>
+        <p:nvSpPr>
+          <p:cNvPr id="5" name="Rounded Rectangle 4"/>
+          <p:cNvSpPr/>
+          <p:nvPr/>
+        </p:nvSpPr>
+        <p:spPr>
+          <a:xfrm>
+            <a:off x="6126480" y="1353312"/>
+            <a:ext cx="5577840" cy="1207008"/>
+          </a:xfrm>
+          <a:prstGeom prst="roundRect">
+            <a:avLst>
+              <a:gd name="adj" fmla="val 12121"/>
+            </a:avLst>
+          </a:prstGeom>
+          <a:solidFill>
+            <a:srgbClr val="F7F1E5"/>
+          </a:solidFill>
+          <a:ln w="12700">
+            <a:solidFill>
+              <a:srgbClr val="DED2BA"/>
+            </a:solidFill>
+          </a:ln>
+          <a:effectLst/>
+        </p:spPr>
+        <p:style>
+          <a:lnRef idx="1">
+            <a:schemeClr val="accent1"/>
+          </a:lnRef>
+          <a:fillRef idx="3">
+            <a:schemeClr val="accent1"/>
+          </a:fillRef>
+          <a:effectRef idx="2">
+            <a:schemeClr val="accent1"/>
+          </a:effectRef>
+          <a:fontRef idx="minor">
+            <a:schemeClr val="lt1"/>
+          </a:fontRef>
+        </p:style>
+        <p:txBody>
+          <a:bodyPr rtlCol="0" anchor="ctr"/>
+          <a:lstStyle/>
+          <a:p>
+            <a:pPr algn="ctr"/>
+          </a:p>
+        </p:txBody>
+      </p:sp>
+      <p:sp>
+        <p:nvSpPr>
+          <p:cNvPr id="6" name="TextBox 5"/>
+          <p:cNvSpPr txBox="1"/>
+          <p:nvPr/>
+        </p:nvSpPr>
+        <p:spPr>
+          <a:xfrm>
+            <a:off x="6382512" y="1517904"/>
+            <a:ext cx="2011680" cy="914400"/>
+          </a:xfrm>
+          <a:prstGeom prst="rect">
+            <a:avLst/>
+          </a:prstGeom>
+          <a:noFill/>
+        </p:spPr>
+        <p:txBody>
+          <a:bodyPr wrap="square" lIns="0" rIns="0" tIns="0" bIns="0">
+            <a:spAutoFit/>
+          </a:bodyPr>
+          <a:lstStyle/>
+          <a:p>
+            <a:pPr>
+              <a:lnSpc>
+                <a:spcPct val="107000"/>
+              </a:lnSpc>
+              <a:spcAft>
+                <a:spcPts val="800"/>
+              </a:spcAft>
+            </a:pPr>
+            <a:r>
+              <a:rPr sz="4000" b="1" i="0">
+                <a:solidFill>
+                  <a:srgbClr val="C75B7F"/>
+                </a:solidFill>
+                <a:latin typeface="Noto Sans"/>
+              </a:rPr>
+              <a:t>7,68%</a:t>
+            </a:r>
+          </a:p>
+        </p:txBody>
+      </p:sp>
+      <p:sp>
+        <p:nvSpPr>
+          <p:cNvPr id="7" name="TextBox 6"/>
+          <p:cNvSpPr txBox="1"/>
+          <p:nvPr/>
+        </p:nvSpPr>
+        <p:spPr>
+          <a:xfrm>
+            <a:off x="8412480" y="1554480"/>
+            <a:ext cx="3108960" cy="914400"/>
+          </a:xfrm>
+          <a:prstGeom prst="rect">
+            <a:avLst/>
+          </a:prstGeom>
+          <a:noFill/>
+        </p:spPr>
+        <p:txBody>
+          <a:bodyPr wrap="square" lIns="0" rIns="0" tIns="0" bIns="0">
+            <a:spAutoFit/>
+          </a:bodyPr>
+          <a:lstStyle/>
+          <a:p>
+            <a:pPr>
+              <a:lnSpc>
+                <a:spcPct val="107000"/>
+              </a:lnSpc>
+              <a:spcAft>
+                <a:spcPts val="800"/>
+              </a:spcAft>
+            </a:pPr>
+            <a:r>
+              <a:rPr sz="1300" b="0" i="0">
+                <a:solidFill>
+                  <a:srgbClr val="2E3138"/>
+                </a:solidFill>
+                <a:latin typeface="Noto Sans"/>
+              </a:rPr>
+              <a:t>TPT lulusan SMK (Mei 2026), tertinggi di antara semua jenjang pendidikan</a:t>
+            </a:r>
+          </a:p>
+        </p:txBody>
+      </p:sp>
+      <p:sp>
+        <p:nvSpPr>
+          <p:cNvPr id="8" name="Rounded Rectangle 7"/>
+          <p:cNvSpPr/>
+          <p:nvPr/>
+        </p:nvSpPr>
+        <p:spPr>
+          <a:xfrm>
+            <a:off x="6126480" y="2724912"/>
+            <a:ext cx="5577840" cy="3611880"/>
+          </a:xfrm>
+          <a:prstGeom prst="roundRect">
+            <a:avLst>
+              <a:gd name="adj" fmla="val 4050"/>
+            </a:avLst>
+          </a:prstGeom>
+          <a:solidFill>
+            <a:srgbClr val="F7F1E5"/>
+          </a:solidFill>
+          <a:ln w="12700">
+            <a:solidFill>
+              <a:srgbClr val="DED2BA"/>
+            </a:solidFill>
+          </a:ln>
+          <a:effectLst/>
+        </p:spPr>
+        <p:style>
+          <a:lnRef idx="1">
+            <a:schemeClr val="accent1"/>
+          </a:lnRef>
+          <a:fillRef idx="3">
+            <a:schemeClr val="accent1"/>
+          </a:fillRef>
+          <a:effectRef idx="2">
+            <a:schemeClr val="accent1"/>
+          </a:effectRef>
+          <a:fontRef idx="minor">
+            <a:schemeClr val="lt1"/>
+          </a:fontRef>
+        </p:style>
+        <p:txBody>
+          <a:bodyPr rtlCol="0" anchor="ctr"/>
+          <a:lstStyle/>
+          <a:p>
+            <a:pPr algn="ctr"/>
+          </a:p>
+        </p:txBody>
+      </p:sp>
       <p:pic>
         <p:nvPicPr>
-          <p:cNvPr id="5" name="Picture 4" descr="02_paradoks_pendidikan.png"/>
+          <p:cNvPr id="9" name="Picture 8" descr="02_paradoks_pendidikan.png"/>
           <p:cNvPicPr>
             <a:picLocks noChangeAspect="1"/>
           </p:cNvPicPr>
@@ -4174,8 +5951,8 @@
         </p:blipFill>
         <p:spPr>
           <a:xfrm>
-            <a:off x="6217920" y="1371600"/>
-            <a:ext cx="5303520" cy="2881101"/>
+            <a:off x="6291072" y="3105361"/>
+            <a:ext cx="5248655" cy="2850980"/>
           </a:xfrm>
           <a:prstGeom prst="rect">
             <a:avLst/>
@@ -4196,7 +5973,7 @@
     <p:bg>
       <p:bgPr>
         <a:solidFill>
-          <a:srgbClr val="FFFFFF"/>
+          <a:srgbClr val="EFE7D8"/>
         </a:solidFill>
         <a:effectLst/>
       </p:bgPr>
@@ -4216,8 +5993,8 @@
         </p:nvSpPr>
         <p:spPr>
           <a:xfrm>
-            <a:off x="640080" y="274320"/>
-            <a:ext cx="10881360" cy="822960"/>
+            <a:off x="502920" y="274320"/>
+            <a:ext cx="11155680" cy="777240"/>
           </a:xfrm>
           <a:prstGeom prst="rect">
             <a:avLst/>
@@ -4225,21 +6002,25 @@
           <a:noFill/>
         </p:spPr>
         <p:txBody>
-          <a:bodyPr wrap="square">
+          <a:bodyPr wrap="square" lIns="0" rIns="0" tIns="0" bIns="0">
             <a:spAutoFit/>
           </a:bodyPr>
           <a:lstStyle/>
           <a:p>
             <a:pPr>
+              <a:lnSpc>
+                <a:spcPct val="107000"/>
+              </a:lnSpc>
               <a:spcAft>
                 <a:spcPts val="800"/>
               </a:spcAft>
             </a:pPr>
             <a:r>
-              <a:rPr sz="3000" b="1" i="0">
-                <a:solidFill>
-                  <a:srgbClr val="1E3A8A"/>
-                </a:solidFill>
+              <a:rPr sz="3100" b="1" i="0">
+                <a:solidFill>
+                  <a:srgbClr val="2E3138"/>
+                </a:solidFill>
+                <a:latin typeface="Noto Sans"/>
               </a:rPr>
               <a:t>Tren SMK Membaik, tapi Masih Tertinggi</a:t>
             </a:r>
@@ -4248,24 +6029,27 @@
       </p:sp>
       <p:sp>
         <p:nvSpPr>
-          <p:cNvPr id="3" name="Rectangle 2"/>
+          <p:cNvPr id="3" name="Rounded Rectangle 2"/>
           <p:cNvSpPr/>
           <p:nvPr/>
         </p:nvSpPr>
         <p:spPr>
           <a:xfrm>
-            <a:off x="640080" y="1051560"/>
-            <a:ext cx="1371600" cy="54864"/>
-          </a:xfrm>
-          <a:prstGeom prst="rect">
-            <a:avLst/>
+            <a:off x="521207" y="1042415"/>
+            <a:ext cx="566928" cy="82296"/>
+          </a:xfrm>
+          <a:prstGeom prst="roundRect">
+            <a:avLst>
+              <a:gd name="adj" fmla="val 50000"/>
+            </a:avLst>
           </a:prstGeom>
           <a:solidFill>
-            <a:srgbClr val="0D9488"/>
+            <a:srgbClr val="C75B7F"/>
           </a:solidFill>
           <a:ln>
             <a:noFill/>
           </a:ln>
+          <a:effectLst/>
         </p:spPr>
         <p:style>
           <a:lnRef idx="1">
@@ -4291,100 +6075,49 @@
       </p:sp>
       <p:sp>
         <p:nvSpPr>
-          <p:cNvPr id="4" name="TextBox 3"/>
-          <p:cNvSpPr txBox="1"/>
-          <p:nvPr/>
-        </p:nvSpPr>
-        <p:spPr>
-          <a:xfrm>
-            <a:off x="640080" y="1371600"/>
-            <a:ext cx="5120640" cy="4754880"/>
-          </a:xfrm>
-          <a:prstGeom prst="rect">
-            <a:avLst/>
-          </a:prstGeom>
-          <a:noFill/>
-        </p:spPr>
-        <p:txBody>
-          <a:bodyPr wrap="square">
-            <a:spAutoFit/>
-          </a:bodyPr>
-          <a:lstStyle/>
-          <a:p>
-            <a:pPr marL="171450" indent="-171450">
-              <a:spcBef>
-                <a:spcPts val="200"/>
-              </a:spcBef>
-              <a:spcAft>
-                <a:spcPts val="1000"/>
-              </a:spcAft>
-              <a:buChar char="•"/>
-            </a:pPr>
-            <a:r>
-              <a:rPr sz="1700" b="0" i="0">
-                <a:solidFill>
-                  <a:srgbClr val="1F2937"/>
-                </a:solidFill>
-              </a:rPr>
-              <a:t>TPT SMK turun dari 8,62% (Feb 2024) ke 7,68% (Mei 2026) — turun 0,94 poin persen. Tren membaik.</a:t>
-            </a:r>
-          </a:p>
-          <a:p>
-            <a:pPr marL="171450" indent="-171450">
-              <a:spcBef>
-                <a:spcPts val="200"/>
-              </a:spcBef>
-              <a:spcAft>
-                <a:spcPts val="1000"/>
-              </a:spcAft>
-              <a:buChar char="•"/>
-            </a:pPr>
-            <a:r>
-              <a:rPr sz="1700" b="0" i="0">
-                <a:solidFill>
-                  <a:srgbClr val="1F2937"/>
-                </a:solidFill>
-              </a:rPr>
-              <a:t>Tapi tetap jauh di atas semua jenjang lain: SMA 6,17%, universitas 6,09%, Diploma I/II/III 4,75%, SMP 4,16%, SD 2,31%.</a:t>
-            </a:r>
-          </a:p>
-          <a:p>
-            <a:pPr marL="171450" indent="-171450">
-              <a:spcBef>
-                <a:spcPts val="200"/>
-              </a:spcBef>
-              <a:spcAft>
-                <a:spcPts val="1000"/>
-              </a:spcAft>
-              <a:buChar char="•"/>
-            </a:pPr>
-            <a:r>
-              <a:rPr sz="1700" b="0" i="0">
-                <a:solidFill>
-                  <a:srgbClr val="1F2937"/>
-                </a:solidFill>
-              </a:rPr>
-              <a:t>Lulusan universitas sempat naik dari 5,63% (Feb 2024) ke 6,23% (Feb 2025) sebelum turun ke 6,09%. Lulusan SD stabil di sekitar 2,3% sepanjang periode.</a:t>
-            </a:r>
-          </a:p>
-          <a:p>
-            <a:pPr marL="171450" indent="-171450">
-              <a:spcBef>
-                <a:spcPts val="200"/>
-              </a:spcBef>
-              <a:spcAft>
-                <a:spcPts val="1000"/>
-              </a:spcAft>
-              <a:buChar char="•"/>
-            </a:pPr>
-            <a:r>
-              <a:rPr sz="1700" b="0" i="0">
-                <a:solidFill>
-                  <a:srgbClr val="1F2937"/>
-                </a:solidFill>
-              </a:rPr>
-              <a:t>Perbaikan tren belum menyentuh struktur masalahnya.</a:t>
-            </a:r>
+          <p:cNvPr id="4" name="Rounded Rectangle 3"/>
+          <p:cNvSpPr/>
+          <p:nvPr/>
+        </p:nvSpPr>
+        <p:spPr>
+          <a:xfrm>
+            <a:off x="502920" y="1353312"/>
+            <a:ext cx="5577840" cy="3566160"/>
+          </a:xfrm>
+          <a:prstGeom prst="roundRect">
+            <a:avLst>
+              <a:gd name="adj" fmla="val 4102"/>
+            </a:avLst>
+          </a:prstGeom>
+          <a:solidFill>
+            <a:srgbClr val="F7F1E5"/>
+          </a:solidFill>
+          <a:ln w="12700">
+            <a:solidFill>
+              <a:srgbClr val="DED2BA"/>
+            </a:solidFill>
+          </a:ln>
+          <a:effectLst/>
+        </p:spPr>
+        <p:style>
+          <a:lnRef idx="1">
+            <a:schemeClr val="accent1"/>
+          </a:lnRef>
+          <a:fillRef idx="3">
+            <a:schemeClr val="accent1"/>
+          </a:fillRef>
+          <a:effectRef idx="2">
+            <a:schemeClr val="accent1"/>
+          </a:effectRef>
+          <a:fontRef idx="minor">
+            <a:schemeClr val="lt1"/>
+          </a:fontRef>
+        </p:style>
+        <p:txBody>
+          <a:bodyPr rtlCol="0" anchor="ctr"/>
+          <a:lstStyle/>
+          <a:p>
+            <a:pPr algn="ctr"/>
           </a:p>
         </p:txBody>
       </p:sp>
@@ -4404,14 +6137,293 @@
         </p:blipFill>
         <p:spPr>
           <a:xfrm>
-            <a:off x="6217920" y="1371600"/>
-            <a:ext cx="5303520" cy="2886635"/>
+            <a:off x="667512" y="1709351"/>
+            <a:ext cx="5248655" cy="2854081"/>
           </a:xfrm>
           <a:prstGeom prst="rect">
             <a:avLst/>
           </a:prstGeom>
         </p:spPr>
       </p:pic>
+      <p:sp>
+        <p:nvSpPr>
+          <p:cNvPr id="6" name="Rounded Rectangle 5"/>
+          <p:cNvSpPr/>
+          <p:nvPr/>
+        </p:nvSpPr>
+        <p:spPr>
+          <a:xfrm>
+            <a:off x="502920" y="5138928"/>
+            <a:ext cx="2926080" cy="502920"/>
+          </a:xfrm>
+          <a:prstGeom prst="roundRect">
+            <a:avLst>
+              <a:gd name="adj" fmla="val 50000"/>
+            </a:avLst>
+          </a:prstGeom>
+          <a:solidFill>
+            <a:srgbClr val="C75B7F"/>
+          </a:solidFill>
+          <a:ln>
+            <a:noFill/>
+          </a:ln>
+          <a:effectLst/>
+        </p:spPr>
+        <p:style>
+          <a:lnRef idx="1">
+            <a:schemeClr val="accent1"/>
+          </a:lnRef>
+          <a:fillRef idx="3">
+            <a:schemeClr val="accent1"/>
+          </a:fillRef>
+          <a:effectRef idx="2">
+            <a:schemeClr val="accent1"/>
+          </a:effectRef>
+          <a:fontRef idx="minor">
+            <a:schemeClr val="lt1"/>
+          </a:fontRef>
+        </p:style>
+        <p:txBody>
+          <a:bodyPr rtlCol="0" anchor="ctr"/>
+          <a:lstStyle/>
+          <a:p>
+            <a:pPr algn="ctr"/>
+          </a:p>
+        </p:txBody>
+      </p:sp>
+      <p:sp>
+        <p:nvSpPr>
+          <p:cNvPr id="7" name="TextBox 6"/>
+          <p:cNvSpPr txBox="1"/>
+          <p:nvPr/>
+        </p:nvSpPr>
+        <p:spPr>
+          <a:xfrm>
+            <a:off x="548640" y="5138928"/>
+            <a:ext cx="2834640" cy="502920"/>
+          </a:xfrm>
+          <a:prstGeom prst="rect">
+            <a:avLst/>
+          </a:prstGeom>
+          <a:noFill/>
+        </p:spPr>
+        <p:txBody>
+          <a:bodyPr wrap="square" lIns="0" rIns="0" tIns="0" bIns="0" anchor="ctr">
+            <a:spAutoFit/>
+          </a:bodyPr>
+          <a:lstStyle/>
+          <a:p>
+            <a:pPr algn="ctr">
+              <a:lnSpc>
+                <a:spcPct val="107000"/>
+              </a:lnSpc>
+              <a:spcAft>
+                <a:spcPts val="0"/>
+              </a:spcAft>
+            </a:pPr>
+            <a:r>
+              <a:rPr sz="1250" b="1" i="0">
+                <a:solidFill>
+                  <a:srgbClr val="FFFFFF"/>
+                </a:solidFill>
+                <a:latin typeface="Noto Sans"/>
+              </a:rPr>
+              <a:t>SMK: 8,62% ke 7,68%</a:t>
+            </a:r>
+          </a:p>
+        </p:txBody>
+      </p:sp>
+      <p:sp>
+        <p:nvSpPr>
+          <p:cNvPr id="8" name="Rounded Rectangle 7"/>
+          <p:cNvSpPr/>
+          <p:nvPr/>
+        </p:nvSpPr>
+        <p:spPr>
+          <a:xfrm>
+            <a:off x="3566160" y="5138928"/>
+            <a:ext cx="2514600" cy="502920"/>
+          </a:xfrm>
+          <a:prstGeom prst="roundRect">
+            <a:avLst>
+              <a:gd name="adj" fmla="val 50000"/>
+            </a:avLst>
+          </a:prstGeom>
+          <a:solidFill>
+            <a:srgbClr val="4E7FA6"/>
+          </a:solidFill>
+          <a:ln>
+            <a:noFill/>
+          </a:ln>
+          <a:effectLst/>
+        </p:spPr>
+        <p:style>
+          <a:lnRef idx="1">
+            <a:schemeClr val="accent1"/>
+          </a:lnRef>
+          <a:fillRef idx="3">
+            <a:schemeClr val="accent1"/>
+          </a:fillRef>
+          <a:effectRef idx="2">
+            <a:schemeClr val="accent1"/>
+          </a:effectRef>
+          <a:fontRef idx="minor">
+            <a:schemeClr val="lt1"/>
+          </a:fontRef>
+        </p:style>
+        <p:txBody>
+          <a:bodyPr rtlCol="0" anchor="ctr"/>
+          <a:lstStyle/>
+          <a:p>
+            <a:pPr algn="ctr"/>
+          </a:p>
+        </p:txBody>
+      </p:sp>
+      <p:sp>
+        <p:nvSpPr>
+          <p:cNvPr id="9" name="TextBox 8"/>
+          <p:cNvSpPr txBox="1"/>
+          <p:nvPr/>
+        </p:nvSpPr>
+        <p:spPr>
+          <a:xfrm>
+            <a:off x="3611879" y="5138928"/>
+            <a:ext cx="2423160" cy="502920"/>
+          </a:xfrm>
+          <a:prstGeom prst="rect">
+            <a:avLst/>
+          </a:prstGeom>
+          <a:noFill/>
+        </p:spPr>
+        <p:txBody>
+          <a:bodyPr wrap="square" lIns="0" rIns="0" tIns="0" bIns="0" anchor="ctr">
+            <a:spAutoFit/>
+          </a:bodyPr>
+          <a:lstStyle/>
+          <a:p>
+            <a:pPr algn="ctr">
+              <a:lnSpc>
+                <a:spcPct val="107000"/>
+              </a:lnSpc>
+              <a:spcAft>
+                <a:spcPts val="0"/>
+              </a:spcAft>
+            </a:pPr>
+            <a:r>
+              <a:rPr sz="1250" b="1" i="0">
+                <a:solidFill>
+                  <a:srgbClr val="FFFFFF"/>
+                </a:solidFill>
+                <a:latin typeface="Noto Sans"/>
+              </a:rPr>
+              <a:t>SD ke bawah: 2,31%</a:t>
+            </a:r>
+          </a:p>
+        </p:txBody>
+      </p:sp>
+      <p:sp>
+        <p:nvSpPr>
+          <p:cNvPr id="10" name="TextBox 9"/>
+          <p:cNvSpPr txBox="1"/>
+          <p:nvPr/>
+        </p:nvSpPr>
+        <p:spPr>
+          <a:xfrm>
+            <a:off x="6355080" y="1389888"/>
+            <a:ext cx="5349240" cy="4846320"/>
+          </a:xfrm>
+          <a:prstGeom prst="rect">
+            <a:avLst/>
+          </a:prstGeom>
+          <a:noFill/>
+        </p:spPr>
+        <p:txBody>
+          <a:bodyPr wrap="square" lIns="0" rIns="0" tIns="0" bIns="0">
+            <a:spAutoFit/>
+          </a:bodyPr>
+          <a:lstStyle/>
+          <a:p>
+            <a:pPr marL="171450" indent="-171450">
+              <a:lnSpc>
+                <a:spcPct val="107000"/>
+              </a:lnSpc>
+              <a:spcAft>
+                <a:spcPts val="1100"/>
+              </a:spcAft>
+              <a:buChar char="•"/>
+            </a:pPr>
+            <a:r>
+              <a:rPr sz="1600" b="0" i="0">
+                <a:solidFill>
+                  <a:srgbClr val="2E3138"/>
+                </a:solidFill>
+                <a:latin typeface="Noto Sans"/>
+              </a:rPr>
+              <a:t>TPT SMK turun dari 8,62% (Feb 2024) ke 7,68% (Mei 2026), turun 0,94 poin persen. Tren membaik.</a:t>
+            </a:r>
+          </a:p>
+          <a:p>
+            <a:pPr marL="171450" indent="-171450">
+              <a:lnSpc>
+                <a:spcPct val="107000"/>
+              </a:lnSpc>
+              <a:spcAft>
+                <a:spcPts val="1100"/>
+              </a:spcAft>
+              <a:buChar char="•"/>
+            </a:pPr>
+            <a:r>
+              <a:rPr sz="1600" b="0" i="0">
+                <a:solidFill>
+                  <a:srgbClr val="2E3138"/>
+                </a:solidFill>
+                <a:latin typeface="Noto Sans"/>
+              </a:rPr>
+              <a:t>Tapi tetap jauh di atas semua jenjang lain: SMA 6,17%, universitas 6,09%, Diploma I/II/III 4,75%, SMP 4,16%, SD 2,31%.</a:t>
+            </a:r>
+          </a:p>
+          <a:p>
+            <a:pPr marL="171450" indent="-171450">
+              <a:lnSpc>
+                <a:spcPct val="107000"/>
+              </a:lnSpc>
+              <a:spcAft>
+                <a:spcPts val="1100"/>
+              </a:spcAft>
+              <a:buChar char="•"/>
+            </a:pPr>
+            <a:r>
+              <a:rPr sz="1600" b="0" i="0">
+                <a:solidFill>
+                  <a:srgbClr val="2E3138"/>
+                </a:solidFill>
+                <a:latin typeface="Noto Sans"/>
+              </a:rPr>
+              <a:t>Lulusan universitas sempat naik dari 5,63% (Feb 2024) ke 6,23% (Feb 2025) sebelum turun ke 6,09%. Lulusan SD stabil di sekitar 2,3% sepanjang periode.</a:t>
+            </a:r>
+          </a:p>
+          <a:p>
+            <a:pPr marL="171450" indent="-171450">
+              <a:lnSpc>
+                <a:spcPct val="107000"/>
+              </a:lnSpc>
+              <a:spcAft>
+                <a:spcPts val="1100"/>
+              </a:spcAft>
+              <a:buChar char="•"/>
+            </a:pPr>
+            <a:r>
+              <a:rPr sz="1600" b="0" i="0">
+                <a:solidFill>
+                  <a:srgbClr val="2E3138"/>
+                </a:solidFill>
+                <a:latin typeface="Noto Sans"/>
+              </a:rPr>
+              <a:t>Perbaikan tren belum menyentuh struktur masalahnya.</a:t>
+            </a:r>
+          </a:p>
+        </p:txBody>
+      </p:sp>
     </p:spTree>
   </p:cSld>
   <p:clrMapOvr>
@@ -4426,7 +6438,7 @@
     <p:bg>
       <p:bgPr>
         <a:solidFill>
-          <a:srgbClr val="FFFFFF"/>
+          <a:srgbClr val="EFE7D8"/>
         </a:solidFill>
         <a:effectLst/>
       </p:bgPr>
@@ -4446,8 +6458,8 @@
         </p:nvSpPr>
         <p:spPr>
           <a:xfrm>
-            <a:off x="640080" y="274320"/>
-            <a:ext cx="10881360" cy="822960"/>
+            <a:off x="502920" y="274320"/>
+            <a:ext cx="11155680" cy="777240"/>
           </a:xfrm>
           <a:prstGeom prst="rect">
             <a:avLst/>
@@ -4455,21 +6467,25 @@
           <a:noFill/>
         </p:spPr>
         <p:txBody>
-          <a:bodyPr wrap="square">
+          <a:bodyPr wrap="square" lIns="0" rIns="0" tIns="0" bIns="0">
             <a:spAutoFit/>
           </a:bodyPr>
           <a:lstStyle/>
           <a:p>
             <a:pPr>
+              <a:lnSpc>
+                <a:spcPct val="107000"/>
+              </a:lnSpc>
               <a:spcAft>
                 <a:spcPts val="800"/>
               </a:spcAft>
             </a:pPr>
             <a:r>
-              <a:rPr sz="3000" b="1" i="0">
-                <a:solidFill>
-                  <a:srgbClr val="1E3A8A"/>
-                </a:solidFill>
+              <a:rPr sz="3100" b="1" i="0">
+                <a:solidFill>
+                  <a:srgbClr val="2E3138"/>
+                </a:solidFill>
+                <a:latin typeface="Noto Sans"/>
               </a:rPr>
               <a:t>Generasi Muda: 17,37% Menganggur</a:t>
             </a:r>
@@ -4478,24 +6494,27 @@
       </p:sp>
       <p:sp>
         <p:nvSpPr>
-          <p:cNvPr id="3" name="Rectangle 2"/>
+          <p:cNvPr id="3" name="Rounded Rectangle 2"/>
           <p:cNvSpPr/>
           <p:nvPr/>
         </p:nvSpPr>
         <p:spPr>
           <a:xfrm>
-            <a:off x="640080" y="1051560"/>
-            <a:ext cx="1371600" cy="54864"/>
-          </a:xfrm>
-          <a:prstGeom prst="rect">
-            <a:avLst/>
+            <a:off x="521207" y="1042415"/>
+            <a:ext cx="566928" cy="82296"/>
+          </a:xfrm>
+          <a:prstGeom prst="roundRect">
+            <a:avLst>
+              <a:gd name="adj" fmla="val 50000"/>
+            </a:avLst>
           </a:prstGeom>
           <a:solidFill>
-            <a:srgbClr val="0D9488"/>
+            <a:srgbClr val="C75B7F"/>
           </a:solidFill>
           <a:ln>
             <a:noFill/>
           </a:ln>
+          <a:effectLst/>
         </p:spPr>
         <p:style>
           <a:lnRef idx="1">
@@ -4521,14 +6540,108 @@
       </p:sp>
       <p:sp>
         <p:nvSpPr>
-          <p:cNvPr id="4" name="TextBox 3"/>
+          <p:cNvPr id="4" name="Rounded Rectangle 3"/>
+          <p:cNvSpPr/>
+          <p:nvPr/>
+        </p:nvSpPr>
+        <p:spPr>
+          <a:xfrm>
+            <a:off x="502920" y="1353312"/>
+            <a:ext cx="4480560" cy="2304288"/>
+          </a:xfrm>
+          <a:prstGeom prst="roundRect">
+            <a:avLst>
+              <a:gd name="adj" fmla="val 7142"/>
+            </a:avLst>
+          </a:prstGeom>
+          <a:solidFill>
+            <a:srgbClr val="F7F1E5"/>
+          </a:solidFill>
+          <a:ln w="12700">
+            <a:solidFill>
+              <a:srgbClr val="DED2BA"/>
+            </a:solidFill>
+          </a:ln>
+          <a:effectLst/>
+        </p:spPr>
+        <p:style>
+          <a:lnRef idx="1">
+            <a:schemeClr val="accent1"/>
+          </a:lnRef>
+          <a:fillRef idx="3">
+            <a:schemeClr val="accent1"/>
+          </a:fillRef>
+          <a:effectRef idx="2">
+            <a:schemeClr val="accent1"/>
+          </a:effectRef>
+          <a:fontRef idx="minor">
+            <a:schemeClr val="lt1"/>
+          </a:fontRef>
+        </p:style>
+        <p:txBody>
+          <a:bodyPr rtlCol="0" anchor="ctr"/>
+          <a:lstStyle/>
+          <a:p>
+            <a:pPr algn="ctr"/>
+          </a:p>
+        </p:txBody>
+      </p:sp>
+      <p:sp>
+        <p:nvSpPr>
+          <p:cNvPr id="5" name="Rounded Rectangle 4"/>
+          <p:cNvSpPr/>
+          <p:nvPr/>
+        </p:nvSpPr>
+        <p:spPr>
+          <a:xfrm>
+            <a:off x="585216" y="1435608"/>
+            <a:ext cx="4315968" cy="2139696"/>
+          </a:xfrm>
+          <a:prstGeom prst="roundRect">
+            <a:avLst>
+              <a:gd name="adj" fmla="val 6837"/>
+            </a:avLst>
+          </a:prstGeom>
+          <a:noFill/>
+          <a:ln w="15240">
+            <a:solidFill>
+              <a:srgbClr val="EFC3D2"/>
+            </a:solidFill>
+          </a:ln>
+          <a:effectLst/>
+        </p:spPr>
+        <p:style>
+          <a:lnRef idx="1">
+            <a:schemeClr val="accent1"/>
+          </a:lnRef>
+          <a:fillRef idx="3">
+            <a:schemeClr val="accent1"/>
+          </a:fillRef>
+          <a:effectRef idx="2">
+            <a:schemeClr val="accent1"/>
+          </a:effectRef>
+          <a:fontRef idx="minor">
+            <a:schemeClr val="lt1"/>
+          </a:fontRef>
+        </p:style>
+        <p:txBody>
+          <a:bodyPr rtlCol="0" anchor="ctr"/>
+          <a:lstStyle/>
+          <a:p>
+            <a:pPr algn="ctr"/>
+          </a:p>
+        </p:txBody>
+      </p:sp>
+      <p:sp>
+        <p:nvSpPr>
+          <p:cNvPr id="6" name="TextBox 5"/>
           <p:cNvSpPr txBox="1"/>
           <p:nvPr/>
         </p:nvSpPr>
         <p:spPr>
           <a:xfrm>
-            <a:off x="640080" y="1371600"/>
-            <a:ext cx="5120640" cy="4754880"/>
+            <a:off x="731520" y="1517904"/>
+            <a:ext cx="4023360" cy="960120"/>
           </a:xfrm>
           <a:prstGeom prst="rect">
             <a:avLst/>
@@ -4536,91 +6649,212 @@
           <a:noFill/>
         </p:spPr>
         <p:txBody>
-          <a:bodyPr wrap="square">
+          <a:bodyPr wrap="square" lIns="0" rIns="0" tIns="0" bIns="0">
             <a:spAutoFit/>
           </a:bodyPr>
           <a:lstStyle/>
           <a:p>
-            <a:pPr marL="171450" indent="-171450">
-              <a:spcBef>
-                <a:spcPts val="200"/>
-              </a:spcBef>
+            <a:pPr algn="ctr">
+              <a:lnSpc>
+                <a:spcPct val="107000"/>
+              </a:lnSpc>
               <a:spcAft>
-                <a:spcPts val="1000"/>
+                <a:spcPts val="800"/>
               </a:spcAft>
-              <a:buChar char="•"/>
             </a:pPr>
             <a:r>
-              <a:rPr sz="1700" b="0" i="0">
-                <a:solidFill>
-                  <a:srgbClr val="1F2937"/>
-                </a:solidFill>
+              <a:rPr sz="5400" b="1" i="0">
+                <a:solidFill>
+                  <a:srgbClr val="C75B7F"/>
+                </a:solidFill>
+                <a:latin typeface="Noto Sans"/>
               </a:rPr>
-              <a:t>TPT usia 15-24 tahun: 17,37% (Mei 2026), naik 1,01 poin persen dari Feb 2026 — satu-satunya kelompok umur yang TPT-nya naik dalam periode itu.</a:t>
-            </a:r>
-          </a:p>
-          <a:p>
-            <a:pPr marL="171450" indent="-171450">
-              <a:spcBef>
-                <a:spcPts val="200"/>
-              </a:spcBef>
+              <a:t>17,37%</a:t>
+            </a:r>
+          </a:p>
+        </p:txBody>
+      </p:sp>
+      <p:sp>
+        <p:nvSpPr>
+          <p:cNvPr id="7" name="TextBox 6"/>
+          <p:cNvSpPr txBox="1"/>
+          <p:nvPr/>
+        </p:nvSpPr>
+        <p:spPr>
+          <a:xfrm>
+            <a:off x="731520" y="2523744"/>
+            <a:ext cx="4023360" cy="411480"/>
+          </a:xfrm>
+          <a:prstGeom prst="rect">
+            <a:avLst/>
+          </a:prstGeom>
+          <a:noFill/>
+        </p:spPr>
+        <p:txBody>
+          <a:bodyPr wrap="square" lIns="0" rIns="0" tIns="0" bIns="0">
+            <a:spAutoFit/>
+          </a:bodyPr>
+          <a:lstStyle/>
+          <a:p>
+            <a:pPr algn="ctr">
+              <a:lnSpc>
+                <a:spcPct val="107000"/>
+              </a:lnSpc>
               <a:spcAft>
-                <a:spcPts val="1000"/>
+                <a:spcPts val="800"/>
               </a:spcAft>
-              <a:buChar char="•"/>
             </a:pPr>
             <a:r>
-              <a:rPr sz="1700" b="0" i="0">
-                <a:solidFill>
-                  <a:srgbClr val="1F2937"/>
-                </a:solidFill>
+              <a:rPr sz="1350" b="1" i="0">
+                <a:solidFill>
+                  <a:srgbClr val="2E3138"/>
+                </a:solidFill>
+                <a:latin typeface="Noto Sans"/>
               </a:rPr>
-              <a:t>Angka ini 3,74 kali lipat rata-rata nasional dan 6,79 kali lipat usia produktif 25-59 tahun (2,56%).</a:t>
-            </a:r>
-          </a:p>
-          <a:p>
-            <a:pPr marL="171450" indent="-171450">
-              <a:spcBef>
-                <a:spcPts val="200"/>
-              </a:spcBef>
+              <a:t>TPT usia 15-24 tahun (Mei 2026)</a:t>
+            </a:r>
+          </a:p>
+        </p:txBody>
+      </p:sp>
+      <p:sp>
+        <p:nvSpPr>
+          <p:cNvPr id="8" name="Rounded Rectangle 7"/>
+          <p:cNvSpPr/>
+          <p:nvPr/>
+        </p:nvSpPr>
+        <p:spPr>
+          <a:xfrm>
+            <a:off x="1371600" y="3017520"/>
+            <a:ext cx="2743200" cy="438912"/>
+          </a:xfrm>
+          <a:prstGeom prst="roundRect">
+            <a:avLst>
+              <a:gd name="adj" fmla="val 50000"/>
+            </a:avLst>
+          </a:prstGeom>
+          <a:solidFill>
+            <a:srgbClr val="EFC3D2"/>
+          </a:solidFill>
+          <a:ln>
+            <a:noFill/>
+          </a:ln>
+          <a:effectLst/>
+        </p:spPr>
+        <p:style>
+          <a:lnRef idx="1">
+            <a:schemeClr val="accent1"/>
+          </a:lnRef>
+          <a:fillRef idx="3">
+            <a:schemeClr val="accent1"/>
+          </a:fillRef>
+          <a:effectRef idx="2">
+            <a:schemeClr val="accent1"/>
+          </a:effectRef>
+          <a:fontRef idx="minor">
+            <a:schemeClr val="lt1"/>
+          </a:fontRef>
+        </p:style>
+        <p:txBody>
+          <a:bodyPr rtlCol="0" anchor="ctr"/>
+          <a:lstStyle/>
+          <a:p>
+            <a:pPr algn="ctr"/>
+          </a:p>
+        </p:txBody>
+      </p:sp>
+      <p:sp>
+        <p:nvSpPr>
+          <p:cNvPr id="9" name="TextBox 8"/>
+          <p:cNvSpPr txBox="1"/>
+          <p:nvPr/>
+        </p:nvSpPr>
+        <p:spPr>
+          <a:xfrm>
+            <a:off x="1417320" y="3017520"/>
+            <a:ext cx="2651760" cy="438912"/>
+          </a:xfrm>
+          <a:prstGeom prst="rect">
+            <a:avLst/>
+          </a:prstGeom>
+          <a:noFill/>
+        </p:spPr>
+        <p:txBody>
+          <a:bodyPr wrap="square" lIns="0" rIns="0" tIns="0" bIns="0" anchor="ctr">
+            <a:spAutoFit/>
+          </a:bodyPr>
+          <a:lstStyle/>
+          <a:p>
+            <a:pPr algn="ctr">
+              <a:lnSpc>
+                <a:spcPct val="107000"/>
+              </a:lnSpc>
               <a:spcAft>
-                <a:spcPts val="1000"/>
+                <a:spcPts val="0"/>
               </a:spcAft>
-              <a:buChar char="•"/>
             </a:pPr>
             <a:r>
-              <a:rPr sz="1700" b="0" i="0">
-                <a:solidFill>
-                  <a:srgbClr val="1F2937"/>
-                </a:solidFill>
+              <a:rPr sz="1200" b="1" i="0">
+                <a:solidFill>
+                  <a:srgbClr val="2E3138"/>
+                </a:solidFill>
+                <a:latin typeface="Noto Sans"/>
               </a:rPr>
-              <a:t>Kelompok 25-59 tahun justru turun dari 3,08% (Feb 2024) ke 2,56%; kelompok 60 tahun ke atas naik perlahan ke 2,35%.</a:t>
-            </a:r>
-          </a:p>
-          <a:p>
-            <a:pPr marL="171450" indent="-171450">
-              <a:spcBef>
-                <a:spcPts val="200"/>
-              </a:spcBef>
-              <a:spcAft>
-                <a:spcPts val="1000"/>
-              </a:spcAft>
-              <a:buChar char="•"/>
-            </a:pPr>
-            <a:r>
-              <a:rPr sz="1700" b="0" i="0">
-                <a:solidFill>
-                  <a:srgbClr val="1F2937"/>
-                </a:solidFill>
-              </a:rPr>
-              <a:t>Krisis pengangguran Indonesia adalah krisis pengangguran muda — dan sebagian besar penganggur muda adalah lulusan SMA/SMK.</a:t>
-            </a:r>
+              <a:t>3,74x rata-rata nasional</a:t>
+            </a:r>
+          </a:p>
+        </p:txBody>
+      </p:sp>
+      <p:sp>
+        <p:nvSpPr>
+          <p:cNvPr id="10" name="Rounded Rectangle 9"/>
+          <p:cNvSpPr/>
+          <p:nvPr/>
+        </p:nvSpPr>
+        <p:spPr>
+          <a:xfrm>
+            <a:off x="502920" y="3858768"/>
+            <a:ext cx="4480560" cy="2670048"/>
+          </a:xfrm>
+          <a:prstGeom prst="roundRect">
+            <a:avLst>
+              <a:gd name="adj" fmla="val 5479"/>
+            </a:avLst>
+          </a:prstGeom>
+          <a:solidFill>
+            <a:srgbClr val="F7F1E5"/>
+          </a:solidFill>
+          <a:ln w="12700">
+            <a:solidFill>
+              <a:srgbClr val="DED2BA"/>
+            </a:solidFill>
+          </a:ln>
+          <a:effectLst/>
+        </p:spPr>
+        <p:style>
+          <a:lnRef idx="1">
+            <a:schemeClr val="accent1"/>
+          </a:lnRef>
+          <a:fillRef idx="3">
+            <a:schemeClr val="accent1"/>
+          </a:fillRef>
+          <a:effectRef idx="2">
+            <a:schemeClr val="accent1"/>
+          </a:effectRef>
+          <a:fontRef idx="minor">
+            <a:schemeClr val="lt1"/>
+          </a:fontRef>
+        </p:style>
+        <p:txBody>
+          <a:bodyPr rtlCol="0" anchor="ctr"/>
+          <a:lstStyle/>
+          <a:p>
+            <a:pPr algn="ctr"/>
           </a:p>
         </p:txBody>
       </p:sp>
       <p:pic>
         <p:nvPicPr>
-          <p:cNvPr id="5" name="Picture 4" descr="04_umur.png"/>
+          <p:cNvPr id="11" name="Picture 10" descr="04_umur.png"/>
           <p:cNvPicPr>
             <a:picLocks noChangeAspect="1"/>
           </p:cNvPicPr>
@@ -4634,14 +6868,117 @@
         </p:blipFill>
         <p:spPr>
           <a:xfrm>
-            <a:off x="6217920" y="1371600"/>
-            <a:ext cx="5303520" cy="2884685"/>
+            <a:off x="667512" y="4065087"/>
+            <a:ext cx="4151376" cy="2257409"/>
           </a:xfrm>
           <a:prstGeom prst="rect">
             <a:avLst/>
           </a:prstGeom>
         </p:spPr>
       </p:pic>
+      <p:sp>
+        <p:nvSpPr>
+          <p:cNvPr id="12" name="TextBox 11"/>
+          <p:cNvSpPr txBox="1"/>
+          <p:nvPr/>
+        </p:nvSpPr>
+        <p:spPr>
+          <a:xfrm>
+            <a:off x="5285232" y="1389888"/>
+            <a:ext cx="6400800" cy="4846320"/>
+          </a:xfrm>
+          <a:prstGeom prst="rect">
+            <a:avLst/>
+          </a:prstGeom>
+          <a:noFill/>
+        </p:spPr>
+        <p:txBody>
+          <a:bodyPr wrap="square" lIns="0" rIns="0" tIns="0" bIns="0">
+            <a:spAutoFit/>
+          </a:bodyPr>
+          <a:lstStyle/>
+          <a:p>
+            <a:pPr marL="171450" indent="-171450">
+              <a:lnSpc>
+                <a:spcPct val="107000"/>
+              </a:lnSpc>
+              <a:spcAft>
+                <a:spcPts val="1100"/>
+              </a:spcAft>
+              <a:buChar char="•"/>
+            </a:pPr>
+            <a:r>
+              <a:rPr sz="1600" b="0" i="0">
+                <a:solidFill>
+                  <a:srgbClr val="2E3138"/>
+                </a:solidFill>
+                <a:latin typeface="Noto Sans"/>
+              </a:rPr>
+              <a:t>TPT usia 15-24 tahun: 17,37% (Mei 2026), naik 1,01 poin persen dari Feb 2026, satu-satunya kelompok umur yang TPT-nya naik dalam periode itu.</a:t>
+            </a:r>
+          </a:p>
+          <a:p>
+            <a:pPr marL="171450" indent="-171450">
+              <a:lnSpc>
+                <a:spcPct val="107000"/>
+              </a:lnSpc>
+              <a:spcAft>
+                <a:spcPts val="1100"/>
+              </a:spcAft>
+              <a:buChar char="•"/>
+            </a:pPr>
+            <a:r>
+              <a:rPr sz="1600" b="0" i="0">
+                <a:solidFill>
+                  <a:srgbClr val="2E3138"/>
+                </a:solidFill>
+                <a:latin typeface="Noto Sans"/>
+              </a:rPr>
+              <a:t>Angka ini 3,74 kali lipat rata-rata nasional dan 6,79 kali lipat usia produktif 25-59 tahun (2,56%).</a:t>
+            </a:r>
+          </a:p>
+          <a:p>
+            <a:pPr marL="171450" indent="-171450">
+              <a:lnSpc>
+                <a:spcPct val="107000"/>
+              </a:lnSpc>
+              <a:spcAft>
+                <a:spcPts val="1100"/>
+              </a:spcAft>
+              <a:buChar char="•"/>
+            </a:pPr>
+            <a:r>
+              <a:rPr sz="1600" b="0" i="0">
+                <a:solidFill>
+                  <a:srgbClr val="2E3138"/>
+                </a:solidFill>
+                <a:latin typeface="Noto Sans"/>
+              </a:rPr>
+              <a:t>Kelompok 25-59 tahun justru turun dari 3,08% (Feb 2024) ke 2,56%; kelompok 60 tahun ke atas naik perlahan ke 2,35%.</a:t>
+            </a:r>
+          </a:p>
+          <a:p>
+            <a:pPr marL="171450" indent="-171450">
+              <a:lnSpc>
+                <a:spcPct val="107000"/>
+              </a:lnSpc>
+              <a:spcAft>
+                <a:spcPts val="1100"/>
+              </a:spcAft>
+              <a:buChar char="•"/>
+            </a:pPr>
+            <a:r>
+              <a:rPr sz="1600" b="0" i="0">
+                <a:solidFill>
+                  <a:srgbClr val="2E3138"/>
+                </a:solidFill>
+                <a:latin typeface="Noto Sans"/>
+              </a:rPr>
+              <a:t>Krisis pengangguran Indonesia adalah krisis pengangguran muda, dan sebagian besar penganggur muda adalah lulusan SMA/SMK.</a:t>
+            </a:r>
+          </a:p>
+        </p:txBody>
+      </p:sp>
     </p:spTree>
   </p:cSld>
   <p:clrMapOvr>
@@ -4656,7 +6993,7 @@
     <p:bg>
       <p:bgPr>
         <a:solidFill>
-          <a:srgbClr val="FFFFFF"/>
+          <a:srgbClr val="EFE7D8"/>
         </a:solidFill>
         <a:effectLst/>
       </p:bgPr>
@@ -4676,8 +7013,8 @@
         </p:nvSpPr>
         <p:spPr>
           <a:xfrm>
-            <a:off x="640080" y="274320"/>
-            <a:ext cx="10881360" cy="822960"/>
+            <a:off x="502920" y="274320"/>
+            <a:ext cx="11155680" cy="777240"/>
           </a:xfrm>
           <a:prstGeom prst="rect">
             <a:avLst/>
@@ -4685,21 +7022,25 @@
           <a:noFill/>
         </p:spPr>
         <p:txBody>
-          <a:bodyPr wrap="square">
+          <a:bodyPr wrap="square" lIns="0" rIns="0" tIns="0" bIns="0">
             <a:spAutoFit/>
           </a:bodyPr>
           <a:lstStyle/>
           <a:p>
             <a:pPr>
+              <a:lnSpc>
+                <a:spcPct val="107000"/>
+              </a:lnSpc>
               <a:spcAft>
                 <a:spcPts val="800"/>
               </a:spcAft>
             </a:pPr>
             <a:r>
-              <a:rPr sz="3000" b="1" i="0">
-                <a:solidFill>
-                  <a:srgbClr val="1E3A8A"/>
-                </a:solidFill>
+              <a:rPr sz="3100" b="1" i="0">
+                <a:solidFill>
+                  <a:srgbClr val="2E3138"/>
+                </a:solidFill>
+                <a:latin typeface="Noto Sans"/>
               </a:rPr>
               <a:t>Kesenjangan Gender dan Kota-Desa</a:t>
             </a:r>
@@ -4708,24 +7049,27 @@
       </p:sp>
       <p:sp>
         <p:nvSpPr>
-          <p:cNvPr id="3" name="Rectangle 2"/>
+          <p:cNvPr id="3" name="Rounded Rectangle 2"/>
           <p:cNvSpPr/>
           <p:nvPr/>
         </p:nvSpPr>
         <p:spPr>
           <a:xfrm>
-            <a:off x="640080" y="1051560"/>
-            <a:ext cx="1371600" cy="54864"/>
-          </a:xfrm>
-          <a:prstGeom prst="rect">
-            <a:avLst/>
+            <a:off x="521207" y="1042415"/>
+            <a:ext cx="566928" cy="82296"/>
+          </a:xfrm>
+          <a:prstGeom prst="roundRect">
+            <a:avLst>
+              <a:gd name="adj" fmla="val 50000"/>
+            </a:avLst>
           </a:prstGeom>
           <a:solidFill>
-            <a:srgbClr val="0D9488"/>
+            <a:srgbClr val="C75B7F"/>
           </a:solidFill>
           <a:ln>
             <a:noFill/>
           </a:ln>
+          <a:effectLst/>
         </p:spPr>
         <p:style>
           <a:lnRef idx="1">
@@ -4757,8 +7101,8 @@
         </p:nvSpPr>
         <p:spPr>
           <a:xfrm>
-            <a:off x="640080" y="1371600"/>
-            <a:ext cx="5120640" cy="4754880"/>
+            <a:off x="502920" y="1389888"/>
+            <a:ext cx="5349240" cy="4846320"/>
           </a:xfrm>
           <a:prstGeom prst="rect">
             <a:avLst/>
@@ -4766,72 +7110,479 @@
           <a:noFill/>
         </p:spPr>
         <p:txBody>
-          <a:bodyPr wrap="square">
+          <a:bodyPr wrap="square" lIns="0" rIns="0" tIns="0" bIns="0">
             <a:spAutoFit/>
           </a:bodyPr>
           <a:lstStyle/>
           <a:p>
             <a:pPr marL="171450" indent="-171450">
-              <a:spcBef>
-                <a:spcPts val="200"/>
-              </a:spcBef>
+              <a:lnSpc>
+                <a:spcPct val="107000"/>
+              </a:lnSpc>
               <a:spcAft>
-                <a:spcPts val="1000"/>
+                <a:spcPts val="1100"/>
               </a:spcAft>
               <a:buChar char="•"/>
             </a:pPr>
             <a:r>
-              <a:rPr sz="1700" b="0" i="0">
-                <a:solidFill>
-                  <a:srgbClr val="1F2937"/>
-                </a:solidFill>
+              <a:rPr sz="1600" b="0" i="0">
+                <a:solidFill>
+                  <a:srgbClr val="2E3138"/>
+                </a:solidFill>
+                <a:latin typeface="Noto Sans"/>
               </a:rPr>
-              <a:t>Pengangguran perkotaan 5,6% vs perdesaan 3,2% — selisih 2,4 poin persen, kota 1,75 kali lipat desa.</a:t>
+              <a:t>Pengangguran perkotaan 5,6% vs perdesaan 3,2%, selisih 2,4 poin persen, kota 1,75 kali lipat desa.</a:t>
             </a:r>
           </a:p>
           <a:p>
             <a:pPr marL="171450" indent="-171450">
-              <a:spcBef>
-                <a:spcPts val="200"/>
-              </a:spcBef>
+              <a:lnSpc>
+                <a:spcPct val="107000"/>
+              </a:lnSpc>
               <a:spcAft>
-                <a:spcPts val="1000"/>
+                <a:spcPts val="1100"/>
               </a:spcAft>
               <a:buChar char="•"/>
             </a:pPr>
             <a:r>
-              <a:rPr sz="1700" b="0" i="0">
-                <a:solidFill>
-                  <a:srgbClr val="1F2937"/>
-                </a:solidFill>
+              <a:rPr sz="1600" b="0" i="0">
+                <a:solidFill>
+                  <a:srgbClr val="2E3138"/>
+                </a:solidFill>
+                <a:latin typeface="Noto Sans"/>
               </a:rPr>
-              <a:t>Laki-laki 4,88% vs perempuan 4,36% (selisih 0,52 pp). Tapi TPAK perempuan hanya 56,41% vs laki-laki 84,57% — banyak perempuan bahkan tidak masuk angkatan kerja.</a:t>
+              <a:t>Laki-laki 4,88% vs perempuan 4,36% (selisih 0,52 pp). Tapi TPAK perempuan hanya 56,41% vs laki-laki 84,57%, banyak perempuan bahkan tidak masuk angkatan kerja.</a:t>
             </a:r>
           </a:p>
           <a:p>
             <a:pPr marL="171450" indent="-171450">
-              <a:spcBef>
-                <a:spcPts val="200"/>
-              </a:spcBef>
+              <a:lnSpc>
+                <a:spcPct val="107000"/>
+              </a:lnSpc>
               <a:spcAft>
-                <a:spcPts val="1000"/>
+                <a:spcPts val="1100"/>
               </a:spcAft>
               <a:buChar char="•"/>
             </a:pPr>
             <a:r>
-              <a:rPr sz="1700" b="0" i="0">
-                <a:solidFill>
-                  <a:srgbClr val="1F2937"/>
-                </a:solidFill>
+              <a:rPr sz="1600" b="0" i="0">
+                <a:solidFill>
+                  <a:srgbClr val="2E3138"/>
+                </a:solidFill>
+                <a:latin typeface="Noto Sans"/>
               </a:rPr>
               <a:t>Artinya: pengangguran adalah persoalan perkotaan, dan di balik angka perempuan yang lebih rendah ada partisipasi yang jauh lebih kecil.</a:t>
             </a:r>
           </a:p>
         </p:txBody>
       </p:sp>
+      <p:sp>
+        <p:nvSpPr>
+          <p:cNvPr id="5" name="Rounded Rectangle 4"/>
+          <p:cNvSpPr/>
+          <p:nvPr/>
+        </p:nvSpPr>
+        <p:spPr>
+          <a:xfrm>
+            <a:off x="6126480" y="1353312"/>
+            <a:ext cx="2697480" cy="1737360"/>
+          </a:xfrm>
+          <a:prstGeom prst="roundRect">
+            <a:avLst>
+              <a:gd name="adj" fmla="val 9473"/>
+            </a:avLst>
+          </a:prstGeom>
+          <a:solidFill>
+            <a:srgbClr val="F7F1E5"/>
+          </a:solidFill>
+          <a:ln w="12700">
+            <a:solidFill>
+              <a:srgbClr val="DED2BA"/>
+            </a:solidFill>
+          </a:ln>
+          <a:effectLst/>
+        </p:spPr>
+        <p:style>
+          <a:lnRef idx="1">
+            <a:schemeClr val="accent1"/>
+          </a:lnRef>
+          <a:fillRef idx="3">
+            <a:schemeClr val="accent1"/>
+          </a:fillRef>
+          <a:effectRef idx="2">
+            <a:schemeClr val="accent1"/>
+          </a:effectRef>
+          <a:fontRef idx="minor">
+            <a:schemeClr val="lt1"/>
+          </a:fontRef>
+        </p:style>
+        <p:txBody>
+          <a:bodyPr rtlCol="0" anchor="ctr"/>
+          <a:lstStyle/>
+          <a:p>
+            <a:pPr algn="ctr"/>
+          </a:p>
+        </p:txBody>
+      </p:sp>
+      <p:sp>
+        <p:nvSpPr>
+          <p:cNvPr id="6" name="Rounded Rectangle 5"/>
+          <p:cNvSpPr/>
+          <p:nvPr/>
+        </p:nvSpPr>
+        <p:spPr>
+          <a:xfrm>
+            <a:off x="6208776" y="1435608"/>
+            <a:ext cx="2532888" cy="1572768"/>
+          </a:xfrm>
+          <a:prstGeom prst="roundRect">
+            <a:avLst>
+              <a:gd name="adj" fmla="val 9302"/>
+            </a:avLst>
+          </a:prstGeom>
+          <a:noFill/>
+          <a:ln w="15240">
+            <a:solidFill>
+              <a:srgbClr val="EFC3D2"/>
+            </a:solidFill>
+          </a:ln>
+          <a:effectLst/>
+        </p:spPr>
+        <p:style>
+          <a:lnRef idx="1">
+            <a:schemeClr val="accent1"/>
+          </a:lnRef>
+          <a:fillRef idx="3">
+            <a:schemeClr val="accent1"/>
+          </a:fillRef>
+          <a:effectRef idx="2">
+            <a:schemeClr val="accent1"/>
+          </a:effectRef>
+          <a:fontRef idx="minor">
+            <a:schemeClr val="lt1"/>
+          </a:fontRef>
+        </p:style>
+        <p:txBody>
+          <a:bodyPr rtlCol="0" anchor="ctr"/>
+          <a:lstStyle/>
+          <a:p>
+            <a:pPr algn="ctr"/>
+          </a:p>
+        </p:txBody>
+      </p:sp>
+      <p:sp>
+        <p:nvSpPr>
+          <p:cNvPr id="7" name="TextBox 6"/>
+          <p:cNvSpPr txBox="1"/>
+          <p:nvPr/>
+        </p:nvSpPr>
+        <p:spPr>
+          <a:xfrm>
+            <a:off x="6263640" y="1572768"/>
+            <a:ext cx="2423160" cy="731520"/>
+          </a:xfrm>
+          <a:prstGeom prst="rect">
+            <a:avLst/>
+          </a:prstGeom>
+          <a:noFill/>
+        </p:spPr>
+        <p:txBody>
+          <a:bodyPr wrap="square" lIns="0" rIns="0" tIns="0" bIns="0">
+            <a:spAutoFit/>
+          </a:bodyPr>
+          <a:lstStyle/>
+          <a:p>
+            <a:pPr algn="ctr">
+              <a:lnSpc>
+                <a:spcPct val="107000"/>
+              </a:lnSpc>
+              <a:spcAft>
+                <a:spcPts val="800"/>
+              </a:spcAft>
+            </a:pPr>
+            <a:r>
+              <a:rPr sz="3000" b="1" i="0">
+                <a:solidFill>
+                  <a:srgbClr val="4E7FA6"/>
+                </a:solidFill>
+                <a:latin typeface="Noto Sans"/>
+              </a:rPr>
+              <a:t>5,60%</a:t>
+            </a:r>
+          </a:p>
+        </p:txBody>
+      </p:sp>
+      <p:sp>
+        <p:nvSpPr>
+          <p:cNvPr id="8" name="TextBox 7"/>
+          <p:cNvSpPr txBox="1"/>
+          <p:nvPr/>
+        </p:nvSpPr>
+        <p:spPr>
+          <a:xfrm>
+            <a:off x="6263640" y="2340864"/>
+            <a:ext cx="2423160" cy="411480"/>
+          </a:xfrm>
+          <a:prstGeom prst="rect">
+            <a:avLst/>
+          </a:prstGeom>
+          <a:noFill/>
+        </p:spPr>
+        <p:txBody>
+          <a:bodyPr wrap="square" lIns="0" rIns="0" tIns="0" bIns="0">
+            <a:spAutoFit/>
+          </a:bodyPr>
+          <a:lstStyle/>
+          <a:p>
+            <a:pPr algn="ctr">
+              <a:lnSpc>
+                <a:spcPct val="107000"/>
+              </a:lnSpc>
+              <a:spcAft>
+                <a:spcPts val="800"/>
+              </a:spcAft>
+            </a:pPr>
+            <a:r>
+              <a:rPr sz="1200" b="0" i="0">
+                <a:solidFill>
+                  <a:srgbClr val="2E3138"/>
+                </a:solidFill>
+                <a:latin typeface="Noto Sans"/>
+              </a:rPr>
+              <a:t>Perkotaan (Feb 2026)</a:t>
+            </a:r>
+          </a:p>
+        </p:txBody>
+      </p:sp>
+      <p:sp>
+        <p:nvSpPr>
+          <p:cNvPr id="9" name="Rounded Rectangle 8"/>
+          <p:cNvSpPr/>
+          <p:nvPr/>
+        </p:nvSpPr>
+        <p:spPr>
+          <a:xfrm>
+            <a:off x="9006840" y="1353312"/>
+            <a:ext cx="2697480" cy="1737360"/>
+          </a:xfrm>
+          <a:prstGeom prst="roundRect">
+            <a:avLst>
+              <a:gd name="adj" fmla="val 9473"/>
+            </a:avLst>
+          </a:prstGeom>
+          <a:solidFill>
+            <a:srgbClr val="F7F1E5"/>
+          </a:solidFill>
+          <a:ln w="12700">
+            <a:solidFill>
+              <a:srgbClr val="DED2BA"/>
+            </a:solidFill>
+          </a:ln>
+          <a:effectLst/>
+        </p:spPr>
+        <p:style>
+          <a:lnRef idx="1">
+            <a:schemeClr val="accent1"/>
+          </a:lnRef>
+          <a:fillRef idx="3">
+            <a:schemeClr val="accent1"/>
+          </a:fillRef>
+          <a:effectRef idx="2">
+            <a:schemeClr val="accent1"/>
+          </a:effectRef>
+          <a:fontRef idx="minor">
+            <a:schemeClr val="lt1"/>
+          </a:fontRef>
+        </p:style>
+        <p:txBody>
+          <a:bodyPr rtlCol="0" anchor="ctr"/>
+          <a:lstStyle/>
+          <a:p>
+            <a:pPr algn="ctr"/>
+          </a:p>
+        </p:txBody>
+      </p:sp>
+      <p:sp>
+        <p:nvSpPr>
+          <p:cNvPr id="10" name="Rounded Rectangle 9"/>
+          <p:cNvSpPr/>
+          <p:nvPr/>
+        </p:nvSpPr>
+        <p:spPr>
+          <a:xfrm>
+            <a:off x="9089136" y="1435608"/>
+            <a:ext cx="2532888" cy="1572768"/>
+          </a:xfrm>
+          <a:prstGeom prst="roundRect">
+            <a:avLst>
+              <a:gd name="adj" fmla="val 9302"/>
+            </a:avLst>
+          </a:prstGeom>
+          <a:noFill/>
+          <a:ln w="15240">
+            <a:solidFill>
+              <a:srgbClr val="EFC3D2"/>
+            </a:solidFill>
+          </a:ln>
+          <a:effectLst/>
+        </p:spPr>
+        <p:style>
+          <a:lnRef idx="1">
+            <a:schemeClr val="accent1"/>
+          </a:lnRef>
+          <a:fillRef idx="3">
+            <a:schemeClr val="accent1"/>
+          </a:fillRef>
+          <a:effectRef idx="2">
+            <a:schemeClr val="accent1"/>
+          </a:effectRef>
+          <a:fontRef idx="minor">
+            <a:schemeClr val="lt1"/>
+          </a:fontRef>
+        </p:style>
+        <p:txBody>
+          <a:bodyPr rtlCol="0" anchor="ctr"/>
+          <a:lstStyle/>
+          <a:p>
+            <a:pPr algn="ctr"/>
+          </a:p>
+        </p:txBody>
+      </p:sp>
+      <p:sp>
+        <p:nvSpPr>
+          <p:cNvPr id="11" name="TextBox 10"/>
+          <p:cNvSpPr txBox="1"/>
+          <p:nvPr/>
+        </p:nvSpPr>
+        <p:spPr>
+          <a:xfrm>
+            <a:off x="9144000" y="1572768"/>
+            <a:ext cx="2423160" cy="731520"/>
+          </a:xfrm>
+          <a:prstGeom prst="rect">
+            <a:avLst/>
+          </a:prstGeom>
+          <a:noFill/>
+        </p:spPr>
+        <p:txBody>
+          <a:bodyPr wrap="square" lIns="0" rIns="0" tIns="0" bIns="0">
+            <a:spAutoFit/>
+          </a:bodyPr>
+          <a:lstStyle/>
+          <a:p>
+            <a:pPr algn="ctr">
+              <a:lnSpc>
+                <a:spcPct val="107000"/>
+              </a:lnSpc>
+              <a:spcAft>
+                <a:spcPts val="800"/>
+              </a:spcAft>
+            </a:pPr>
+            <a:r>
+              <a:rPr sz="3000" b="1" i="0">
+                <a:solidFill>
+                  <a:srgbClr val="C75B7F"/>
+                </a:solidFill>
+                <a:latin typeface="Noto Sans"/>
+              </a:rPr>
+              <a:t>3,20%</a:t>
+            </a:r>
+          </a:p>
+        </p:txBody>
+      </p:sp>
+      <p:sp>
+        <p:nvSpPr>
+          <p:cNvPr id="12" name="TextBox 11"/>
+          <p:cNvSpPr txBox="1"/>
+          <p:nvPr/>
+        </p:nvSpPr>
+        <p:spPr>
+          <a:xfrm>
+            <a:off x="9144000" y="2340864"/>
+            <a:ext cx="2423160" cy="411480"/>
+          </a:xfrm>
+          <a:prstGeom prst="rect">
+            <a:avLst/>
+          </a:prstGeom>
+          <a:noFill/>
+        </p:spPr>
+        <p:txBody>
+          <a:bodyPr wrap="square" lIns="0" rIns="0" tIns="0" bIns="0">
+            <a:spAutoFit/>
+          </a:bodyPr>
+          <a:lstStyle/>
+          <a:p>
+            <a:pPr algn="ctr">
+              <a:lnSpc>
+                <a:spcPct val="107000"/>
+              </a:lnSpc>
+              <a:spcAft>
+                <a:spcPts val="800"/>
+              </a:spcAft>
+            </a:pPr>
+            <a:r>
+              <a:rPr sz="1200" b="0" i="0">
+                <a:solidFill>
+                  <a:srgbClr val="2E3138"/>
+                </a:solidFill>
+                <a:latin typeface="Noto Sans"/>
+              </a:rPr>
+              <a:t>Perdesaan (Feb 2026)</a:t>
+            </a:r>
+          </a:p>
+        </p:txBody>
+      </p:sp>
+      <p:sp>
+        <p:nvSpPr>
+          <p:cNvPr id="13" name="Rounded Rectangle 12"/>
+          <p:cNvSpPr/>
+          <p:nvPr/>
+        </p:nvSpPr>
+        <p:spPr>
+          <a:xfrm>
+            <a:off x="6126480" y="3310128"/>
+            <a:ext cx="5577840" cy="3017520"/>
+          </a:xfrm>
+          <a:prstGeom prst="roundRect">
+            <a:avLst>
+              <a:gd name="adj" fmla="val 4848"/>
+            </a:avLst>
+          </a:prstGeom>
+          <a:solidFill>
+            <a:srgbClr val="F7F1E5"/>
+          </a:solidFill>
+          <a:ln w="12700">
+            <a:solidFill>
+              <a:srgbClr val="DED2BA"/>
+            </a:solidFill>
+          </a:ln>
+          <a:effectLst/>
+        </p:spPr>
+        <p:style>
+          <a:lnRef idx="1">
+            <a:schemeClr val="accent1"/>
+          </a:lnRef>
+          <a:fillRef idx="3">
+            <a:schemeClr val="accent1"/>
+          </a:fillRef>
+          <a:effectRef idx="2">
+            <a:schemeClr val="accent1"/>
+          </a:effectRef>
+          <a:fontRef idx="minor">
+            <a:schemeClr val="lt1"/>
+          </a:fontRef>
+        </p:style>
+        <p:txBody>
+          <a:bodyPr rtlCol="0" anchor="ctr"/>
+          <a:lstStyle/>
+          <a:p>
+            <a:pPr algn="ctr"/>
+          </a:p>
+        </p:txBody>
+      </p:sp>
       <p:pic>
         <p:nvPicPr>
-          <p:cNvPr id="5" name="Picture 4" descr="05_kesenjangan.png"/>
+          <p:cNvPr id="14" name="Picture 13" descr="05_kesenjangan.png"/>
           <p:cNvPicPr>
             <a:picLocks noChangeAspect="1"/>
           </p:cNvPicPr>
@@ -4845,8 +7596,8 @@
         </p:blipFill>
         <p:spPr>
           <a:xfrm>
-            <a:off x="6217920" y="1371600"/>
-            <a:ext cx="5303520" cy="2407733"/>
+            <a:off x="6291072" y="3627636"/>
+            <a:ext cx="5248655" cy="2382503"/>
           </a:xfrm>
           <a:prstGeom prst="rect">
             <a:avLst/>
@@ -4867,7 +7618,7 @@
     <p:bg>
       <p:bgPr>
         <a:solidFill>
-          <a:srgbClr val="FFFFFF"/>
+          <a:srgbClr val="EFE7D8"/>
         </a:solidFill>
         <a:effectLst/>
       </p:bgPr>
@@ -4887,8 +7638,8 @@
         </p:nvSpPr>
         <p:spPr>
           <a:xfrm>
-            <a:off x="640080" y="274320"/>
-            <a:ext cx="10881360" cy="822960"/>
+            <a:off x="502920" y="274320"/>
+            <a:ext cx="11155680" cy="777240"/>
           </a:xfrm>
           <a:prstGeom prst="rect">
             <a:avLst/>
@@ -4896,21 +7647,25 @@
           <a:noFill/>
         </p:spPr>
         <p:txBody>
-          <a:bodyPr wrap="square">
+          <a:bodyPr wrap="square" lIns="0" rIns="0" tIns="0" bIns="0">
             <a:spAutoFit/>
           </a:bodyPr>
           <a:lstStyle/>
           <a:p>
             <a:pPr>
+              <a:lnSpc>
+                <a:spcPct val="107000"/>
+              </a:lnSpc>
               <a:spcAft>
                 <a:spcPts val="800"/>
               </a:spcAft>
             </a:pPr>
             <a:r>
-              <a:rPr sz="3000" b="1" i="0">
-                <a:solidFill>
-                  <a:srgbClr val="1E3A8A"/>
-                </a:solidFill>
+              <a:rPr sz="3100" b="1" i="0">
+                <a:solidFill>
+                  <a:srgbClr val="2E3138"/>
+                </a:solidFill>
+                <a:latin typeface="Noto Sans"/>
               </a:rPr>
               <a:t>Jurang Provinsi: Papua vs Bali 4,66 Kali Lipat</a:t>
             </a:r>
@@ -4919,24 +7674,27 @@
       </p:sp>
       <p:sp>
         <p:nvSpPr>
-          <p:cNvPr id="3" name="Rectangle 2"/>
+          <p:cNvPr id="3" name="Rounded Rectangle 2"/>
           <p:cNvSpPr/>
           <p:nvPr/>
         </p:nvSpPr>
         <p:spPr>
           <a:xfrm>
-            <a:off x="640080" y="1051560"/>
-            <a:ext cx="1371600" cy="54864"/>
-          </a:xfrm>
-          <a:prstGeom prst="rect">
-            <a:avLst/>
+            <a:off x="521207" y="1042415"/>
+            <a:ext cx="566928" cy="82296"/>
+          </a:xfrm>
+          <a:prstGeom prst="roundRect">
+            <a:avLst>
+              <a:gd name="adj" fmla="val 50000"/>
+            </a:avLst>
           </a:prstGeom>
           <a:solidFill>
-            <a:srgbClr val="0D9488"/>
+            <a:srgbClr val="C75B7F"/>
           </a:solidFill>
           <a:ln>
             <a:noFill/>
           </a:ln>
+          <a:effectLst/>
         </p:spPr>
         <p:style>
           <a:lnRef idx="1">
@@ -4968,8 +7726,8 @@
         </p:nvSpPr>
         <p:spPr>
           <a:xfrm>
-            <a:off x="640080" y="1371600"/>
-            <a:ext cx="5120640" cy="4754880"/>
+            <a:off x="502920" y="1389888"/>
+            <a:ext cx="5349240" cy="4206240"/>
           </a:xfrm>
           <a:prstGeom prst="rect">
             <a:avLst/>
@@ -4977,91 +7735,143 @@
           <a:noFill/>
         </p:spPr>
         <p:txBody>
-          <a:bodyPr wrap="square">
+          <a:bodyPr wrap="square" lIns="0" rIns="0" tIns="0" bIns="0">
             <a:spAutoFit/>
           </a:bodyPr>
           <a:lstStyle/>
           <a:p>
             <a:pPr marL="171450" indent="-171450">
-              <a:spcBef>
-                <a:spcPts val="200"/>
-              </a:spcBef>
+              <a:lnSpc>
+                <a:spcPct val="107000"/>
+              </a:lnSpc>
               <a:spcAft>
-                <a:spcPts val="1000"/>
+                <a:spcPts val="1100"/>
               </a:spcAft>
               <a:buChar char="•"/>
             </a:pPr>
             <a:r>
-              <a:rPr sz="1700" b="0" i="0">
-                <a:solidFill>
-                  <a:srgbClr val="1F2937"/>
-                </a:solidFill>
+              <a:rPr sz="1600" b="0" i="0">
+                <a:solidFill>
+                  <a:srgbClr val="2E3138"/>
+                </a:solidFill>
+                <a:latin typeface="Noto Sans"/>
               </a:rPr>
-              <a:t>TPT tertinggi: Papua 7,08%; terendah: Bali 1,52% — selisih 4,66 kali lipat.</a:t>
+              <a:t>TPT tertinggi: Papua 7,08%; terendah: Bali 1,52%, selisih 4,66 kali lipat.</a:t>
             </a:r>
           </a:p>
           <a:p>
             <a:pPr marL="171450" indent="-171450">
-              <a:spcBef>
-                <a:spcPts val="200"/>
-              </a:spcBef>
+              <a:lnSpc>
+                <a:spcPct val="107000"/>
+              </a:lnSpc>
               <a:spcAft>
-                <a:spcPts val="1000"/>
+                <a:spcPts val="1100"/>
               </a:spcAft>
               <a:buChar char="•"/>
             </a:pPr>
             <a:r>
-              <a:rPr sz="1700" b="0" i="0">
-                <a:solidFill>
-                  <a:srgbClr val="1F2937"/>
-                </a:solidFill>
+              <a:rPr sz="1600" b="0" i="0">
+                <a:solidFill>
+                  <a:srgbClr val="2E3138"/>
+                </a:solidFill>
+                <a:latin typeface="Noto Sans"/>
               </a:rPr>
               <a:t>Sepuluh provinsi tertinggi: Papua 7,08%, Jawa Barat 6,61%, Banten 6,48%... Jawa Barat dan Banten ikut di papan atas meski pusat industri.</a:t>
             </a:r>
           </a:p>
           <a:p>
             <a:pPr marL="171450" indent="-171450">
-              <a:spcBef>
-                <a:spcPts val="200"/>
-              </a:spcBef>
+              <a:lnSpc>
+                <a:spcPct val="107000"/>
+              </a:lnSpc>
               <a:spcAft>
-                <a:spcPts val="1000"/>
+                <a:spcPts val="1100"/>
               </a:spcAft>
               <a:buChar char="•"/>
             </a:pPr>
             <a:r>
-              <a:rPr sz="1700" b="0" i="0">
-                <a:solidFill>
-                  <a:srgbClr val="1F2937"/>
-                </a:solidFill>
+              <a:rPr sz="1600" b="0" i="0">
+                <a:solidFill>
+                  <a:srgbClr val="2E3138"/>
+                </a:solidFill>
+                <a:latin typeface="Noto Sans"/>
               </a:rPr>
               <a:t>Penurunan terbesar Feb→Mei 2026: Kepulauan Riau (-0,42 pp). Kenaikan terbesar: Sulawesi Tenggara (+0,22 pp).</a:t>
             </a:r>
           </a:p>
           <a:p>
             <a:pPr marL="171450" indent="-171450">
-              <a:spcBef>
-                <a:spcPts val="200"/>
-              </a:spcBef>
+              <a:lnSpc>
+                <a:spcPct val="107000"/>
+              </a:lnSpc>
               <a:spcAft>
-                <a:spcPts val="1000"/>
+                <a:spcPts val="1100"/>
               </a:spcAft>
               <a:buChar char="•"/>
             </a:pPr>
             <a:r>
-              <a:rPr sz="1700" b="0" i="0">
-                <a:solidFill>
-                  <a:srgbClr val="1F2937"/>
-                </a:solidFill>
+              <a:rPr sz="1600" b="0" i="0">
+                <a:solidFill>
+                  <a:srgbClr val="2E3138"/>
+                </a:solidFill>
+                <a:latin typeface="Noto Sans"/>
               </a:rPr>
               <a:t>Catatan: Mei 2026 tersedia untuk 17 provinsi; Papua 2022-2023 tidak sebanding karena pemekaran.</a:t>
             </a:r>
           </a:p>
         </p:txBody>
       </p:sp>
+      <p:sp>
+        <p:nvSpPr>
+          <p:cNvPr id="5" name="Rounded Rectangle 4"/>
+          <p:cNvSpPr/>
+          <p:nvPr/>
+        </p:nvSpPr>
+        <p:spPr>
+          <a:xfrm>
+            <a:off x="6126480" y="1353312"/>
+            <a:ext cx="5577840" cy="3657600"/>
+          </a:xfrm>
+          <a:prstGeom prst="roundRect">
+            <a:avLst>
+              <a:gd name="adj" fmla="val 4000"/>
+            </a:avLst>
+          </a:prstGeom>
+          <a:solidFill>
+            <a:srgbClr val="F7F1E5"/>
+          </a:solidFill>
+          <a:ln w="12700">
+            <a:solidFill>
+              <a:srgbClr val="DED2BA"/>
+            </a:solidFill>
+          </a:ln>
+          <a:effectLst/>
+        </p:spPr>
+        <p:style>
+          <a:lnRef idx="1">
+            <a:schemeClr val="accent1"/>
+          </a:lnRef>
+          <a:fillRef idx="3">
+            <a:schemeClr val="accent1"/>
+          </a:fillRef>
+          <a:effectRef idx="2">
+            <a:schemeClr val="accent1"/>
+          </a:effectRef>
+          <a:fontRef idx="minor">
+            <a:schemeClr val="lt1"/>
+          </a:fontRef>
+        </p:style>
+        <p:txBody>
+          <a:bodyPr rtlCol="0" anchor="ctr"/>
+          <a:lstStyle/>
+          <a:p>
+            <a:pPr algn="ctr"/>
+          </a:p>
+        </p:txBody>
+      </p:sp>
       <p:pic>
         <p:nvPicPr>
-          <p:cNvPr id="5" name="Picture 4" descr="06_provinsi_top10.png"/>
+          <p:cNvPr id="6" name="Picture 5" descr="06_provinsi_top10.png"/>
           <p:cNvPicPr>
             <a:picLocks noChangeAspect="1"/>
           </p:cNvPicPr>
@@ -5075,14 +7885,190 @@
         </p:blipFill>
         <p:spPr>
           <a:xfrm>
-            <a:off x="6217920" y="1371600"/>
-            <a:ext cx="5303520" cy="3157712"/>
+            <a:off x="6291072" y="1618150"/>
+            <a:ext cx="5248655" cy="3127923"/>
           </a:xfrm>
           <a:prstGeom prst="rect">
             <a:avLst/>
           </a:prstGeom>
         </p:spPr>
       </p:pic>
+      <p:sp>
+        <p:nvSpPr>
+          <p:cNvPr id="7" name="Rounded Rectangle 6"/>
+          <p:cNvSpPr/>
+          <p:nvPr/>
+        </p:nvSpPr>
+        <p:spPr>
+          <a:xfrm>
+            <a:off x="6126480" y="5230368"/>
+            <a:ext cx="2697480" cy="502920"/>
+          </a:xfrm>
+          <a:prstGeom prst="roundRect">
+            <a:avLst>
+              <a:gd name="adj" fmla="val 50000"/>
+            </a:avLst>
+          </a:prstGeom>
+          <a:solidFill>
+            <a:srgbClr val="C75B7F"/>
+          </a:solidFill>
+          <a:ln>
+            <a:noFill/>
+          </a:ln>
+          <a:effectLst/>
+        </p:spPr>
+        <p:style>
+          <a:lnRef idx="1">
+            <a:schemeClr val="accent1"/>
+          </a:lnRef>
+          <a:fillRef idx="3">
+            <a:schemeClr val="accent1"/>
+          </a:fillRef>
+          <a:effectRef idx="2">
+            <a:schemeClr val="accent1"/>
+          </a:effectRef>
+          <a:fontRef idx="minor">
+            <a:schemeClr val="lt1"/>
+          </a:fontRef>
+        </p:style>
+        <p:txBody>
+          <a:bodyPr rtlCol="0" anchor="ctr"/>
+          <a:lstStyle/>
+          <a:p>
+            <a:pPr algn="ctr"/>
+          </a:p>
+        </p:txBody>
+      </p:sp>
+      <p:sp>
+        <p:nvSpPr>
+          <p:cNvPr id="8" name="TextBox 7"/>
+          <p:cNvSpPr txBox="1"/>
+          <p:nvPr/>
+        </p:nvSpPr>
+        <p:spPr>
+          <a:xfrm>
+            <a:off x="6172200" y="5230368"/>
+            <a:ext cx="2606040" cy="502920"/>
+          </a:xfrm>
+          <a:prstGeom prst="rect">
+            <a:avLst/>
+          </a:prstGeom>
+          <a:noFill/>
+        </p:spPr>
+        <p:txBody>
+          <a:bodyPr wrap="square" lIns="0" rIns="0" tIns="0" bIns="0" anchor="ctr">
+            <a:spAutoFit/>
+          </a:bodyPr>
+          <a:lstStyle/>
+          <a:p>
+            <a:pPr algn="ctr">
+              <a:lnSpc>
+                <a:spcPct val="107000"/>
+              </a:lnSpc>
+              <a:spcAft>
+                <a:spcPts val="0"/>
+              </a:spcAft>
+            </a:pPr>
+            <a:r>
+              <a:rPr sz="1250" b="1" i="0">
+                <a:solidFill>
+                  <a:srgbClr val="FFFFFF"/>
+                </a:solidFill>
+                <a:latin typeface="Noto Sans"/>
+              </a:rPr>
+              <a:t>Tertinggi: Papua 7,08%</a:t>
+            </a:r>
+          </a:p>
+        </p:txBody>
+      </p:sp>
+      <p:sp>
+        <p:nvSpPr>
+          <p:cNvPr id="9" name="Rounded Rectangle 8"/>
+          <p:cNvSpPr/>
+          <p:nvPr/>
+        </p:nvSpPr>
+        <p:spPr>
+          <a:xfrm>
+            <a:off x="9006840" y="5230368"/>
+            <a:ext cx="2697480" cy="502920"/>
+          </a:xfrm>
+          <a:prstGeom prst="roundRect">
+            <a:avLst>
+              <a:gd name="adj" fmla="val 50000"/>
+            </a:avLst>
+          </a:prstGeom>
+          <a:solidFill>
+            <a:srgbClr val="4E7FA6"/>
+          </a:solidFill>
+          <a:ln>
+            <a:noFill/>
+          </a:ln>
+          <a:effectLst/>
+        </p:spPr>
+        <p:style>
+          <a:lnRef idx="1">
+            <a:schemeClr val="accent1"/>
+          </a:lnRef>
+          <a:fillRef idx="3">
+            <a:schemeClr val="accent1"/>
+          </a:fillRef>
+          <a:effectRef idx="2">
+            <a:schemeClr val="accent1"/>
+          </a:effectRef>
+          <a:fontRef idx="minor">
+            <a:schemeClr val="lt1"/>
+          </a:fontRef>
+        </p:style>
+        <p:txBody>
+          <a:bodyPr rtlCol="0" anchor="ctr"/>
+          <a:lstStyle/>
+          <a:p>
+            <a:pPr algn="ctr"/>
+          </a:p>
+        </p:txBody>
+      </p:sp>
+      <p:sp>
+        <p:nvSpPr>
+          <p:cNvPr id="10" name="TextBox 9"/>
+          <p:cNvSpPr txBox="1"/>
+          <p:nvPr/>
+        </p:nvSpPr>
+        <p:spPr>
+          <a:xfrm>
+            <a:off x="9052560" y="5230368"/>
+            <a:ext cx="2606040" cy="502920"/>
+          </a:xfrm>
+          <a:prstGeom prst="rect">
+            <a:avLst/>
+          </a:prstGeom>
+          <a:noFill/>
+        </p:spPr>
+        <p:txBody>
+          <a:bodyPr wrap="square" lIns="0" rIns="0" tIns="0" bIns="0" anchor="ctr">
+            <a:spAutoFit/>
+          </a:bodyPr>
+          <a:lstStyle/>
+          <a:p>
+            <a:pPr algn="ctr">
+              <a:lnSpc>
+                <a:spcPct val="107000"/>
+              </a:lnSpc>
+              <a:spcAft>
+                <a:spcPts val="0"/>
+              </a:spcAft>
+            </a:pPr>
+            <a:r>
+              <a:rPr sz="1250" b="1" i="0">
+                <a:solidFill>
+                  <a:srgbClr val="FFFFFF"/>
+                </a:solidFill>
+                <a:latin typeface="Noto Sans"/>
+              </a:rPr>
+              <a:t>Terendah: Bali 1,52%</a:t>
+            </a:r>
+          </a:p>
+        </p:txBody>
+      </p:sp>
     </p:spTree>
   </p:cSld>
   <p:clrMapOvr>
@@ -5097,7 +8083,7 @@
     <p:bg>
       <p:bgPr>
         <a:solidFill>
-          <a:srgbClr val="FFFFFF"/>
+          <a:srgbClr val="EFE7D8"/>
         </a:solidFill>
         <a:effectLst/>
       </p:bgPr>
@@ -5117,8 +8103,8 @@
         </p:nvSpPr>
         <p:spPr>
           <a:xfrm>
-            <a:off x="640080" y="274320"/>
-            <a:ext cx="10881360" cy="822960"/>
+            <a:off x="502920" y="274320"/>
+            <a:ext cx="11155680" cy="777240"/>
           </a:xfrm>
           <a:prstGeom prst="rect">
             <a:avLst/>
@@ -5126,21 +8112,25 @@
           <a:noFill/>
         </p:spPr>
         <p:txBody>
-          <a:bodyPr wrap="square">
+          <a:bodyPr wrap="square" lIns="0" rIns="0" tIns="0" bIns="0">
             <a:spAutoFit/>
           </a:bodyPr>
           <a:lstStyle/>
           <a:p>
             <a:pPr>
+              <a:lnSpc>
+                <a:spcPct val="107000"/>
+              </a:lnSpc>
               <a:spcAft>
                 <a:spcPts val="800"/>
               </a:spcAft>
             </a:pPr>
             <a:r>
-              <a:rPr sz="3000" b="1" i="0">
-                <a:solidFill>
-                  <a:srgbClr val="1E3A8A"/>
-                </a:solidFill>
+              <a:rPr sz="3100" b="1" i="0">
+                <a:solidFill>
+                  <a:srgbClr val="2E3138"/>
+                </a:solidFill>
+                <a:latin typeface="Noto Sans"/>
               </a:rPr>
               <a:t>Bukan Sekadar Jumlah: Kualitas Pekerjaan</a:t>
             </a:r>
@@ -5149,24 +8139,27 @@
       </p:sp>
       <p:sp>
         <p:nvSpPr>
-          <p:cNvPr id="3" name="Rectangle 2"/>
+          <p:cNvPr id="3" name="Rounded Rectangle 2"/>
           <p:cNvSpPr/>
           <p:nvPr/>
         </p:nvSpPr>
         <p:spPr>
           <a:xfrm>
-            <a:off x="640080" y="1051560"/>
-            <a:ext cx="1371600" cy="54864"/>
-          </a:xfrm>
-          <a:prstGeom prst="rect">
-            <a:avLst/>
+            <a:off x="521207" y="1042415"/>
+            <a:ext cx="566928" cy="82296"/>
+          </a:xfrm>
+          <a:prstGeom prst="roundRect">
+            <a:avLst>
+              <a:gd name="adj" fmla="val 50000"/>
+            </a:avLst>
           </a:prstGeom>
           <a:solidFill>
-            <a:srgbClr val="0D9488"/>
+            <a:srgbClr val="C75B7F"/>
           </a:solidFill>
           <a:ln>
             <a:noFill/>
           </a:ln>
+          <a:effectLst/>
         </p:spPr>
         <p:style>
           <a:lnRef idx="1">
@@ -5198,8 +8191,8 @@
         </p:nvSpPr>
         <p:spPr>
           <a:xfrm>
-            <a:off x="640080" y="1371600"/>
-            <a:ext cx="10881360" cy="2194560"/>
+            <a:off x="502920" y="1353312"/>
+            <a:ext cx="5486400" cy="2240280"/>
           </a:xfrm>
           <a:prstGeom prst="rect">
             <a:avLst/>
@@ -5207,91 +8200,166 @@
           <a:noFill/>
         </p:spPr>
         <p:txBody>
-          <a:bodyPr wrap="square">
+          <a:bodyPr wrap="square" lIns="0" rIns="0" tIns="0" bIns="0">
             <a:spAutoFit/>
           </a:bodyPr>
           <a:lstStyle/>
           <a:p>
             <a:pPr marL="171450" indent="-171450">
-              <a:spcBef>
-                <a:spcPts val="200"/>
-              </a:spcBef>
+              <a:lnSpc>
+                <a:spcPct val="107000"/>
+              </a:lnSpc>
               <a:spcAft>
-                <a:spcPts val="1000"/>
+                <a:spcPts val="1100"/>
               </a:spcAft>
               <a:buChar char="•"/>
             </a:pPr>
             <a:r>
               <a:rPr sz="1500" b="0" i="0">
                 <a:solidFill>
-                  <a:srgbClr val="1F2937"/>
-                </a:solidFill>
+                  <a:srgbClr val="2E3138"/>
+                </a:solidFill>
+                <a:latin typeface="Noto Sans"/>
               </a:rPr>
-              <a:t>Pekerja formal hanya 40,58% (59,93 jt) — sisanya 59,42% bekerja informal.</a:t>
+              <a:t>Pekerja formal hanya 40,58% (59,93 jt), sisanya 59,42% bekerja informal.</a:t>
             </a:r>
           </a:p>
           <a:p>
             <a:pPr marL="171450" indent="-171450">
-              <a:spcBef>
-                <a:spcPts val="200"/>
-              </a:spcBef>
+              <a:lnSpc>
+                <a:spcPct val="107000"/>
+              </a:lnSpc>
               <a:spcAft>
-                <a:spcPts val="1000"/>
+                <a:spcPts val="1100"/>
               </a:spcAft>
               <a:buChar char="•"/>
             </a:pPr>
             <a:r>
               <a:rPr sz="1500" b="0" i="0">
                 <a:solidFill>
-                  <a:srgbClr val="1F2937"/>
-                </a:solidFill>
+                  <a:srgbClr val="2E3138"/>
+                </a:solidFill>
+                <a:latin typeface="Noto Sans"/>
               </a:rPr>
               <a:t>Setengah menganggur 7,27%, pekerja paruh waktu 25,97%, komuter 7,19 jt.</a:t>
             </a:r>
           </a:p>
+        </p:txBody>
+      </p:sp>
+      <p:sp>
+        <p:nvSpPr>
+          <p:cNvPr id="5" name="TextBox 4"/>
+          <p:cNvSpPr txBox="1"/>
+          <p:nvPr/>
+        </p:nvSpPr>
+        <p:spPr>
+          <a:xfrm>
+            <a:off x="6263640" y="1353312"/>
+            <a:ext cx="5440680" cy="2240280"/>
+          </a:xfrm>
+          <a:prstGeom prst="rect">
+            <a:avLst/>
+          </a:prstGeom>
+          <a:noFill/>
+        </p:spPr>
+        <p:txBody>
+          <a:bodyPr wrap="square" lIns="0" rIns="0" tIns="0" bIns="0">
+            <a:spAutoFit/>
+          </a:bodyPr>
+          <a:lstStyle/>
           <a:p>
             <a:pPr marL="171450" indent="-171450">
-              <a:spcBef>
-                <a:spcPts val="200"/>
-              </a:spcBef>
+              <a:lnSpc>
+                <a:spcPct val="107000"/>
+              </a:lnSpc>
               <a:spcAft>
-                <a:spcPts val="1000"/>
+                <a:spcPts val="1100"/>
               </a:spcAft>
               <a:buChar char="•"/>
             </a:pPr>
             <a:r>
               <a:rPr sz="1500" b="0" i="0">
                 <a:solidFill>
-                  <a:srgbClr val="1F2937"/>
-                </a:solidFill>
+                  <a:srgbClr val="2E3138"/>
+                </a:solidFill>
+                <a:latin typeface="Noto Sans"/>
               </a:rPr>
               <a:t>Upah rata-rata buruh naik dari Rp3,29 jt (Feb 2026) ke Rp3,39 jt (Mei 2026).</a:t>
             </a:r>
           </a:p>
           <a:p>
             <a:pPr marL="171450" indent="-171450">
-              <a:spcBef>
-                <a:spcPts val="200"/>
-              </a:spcBef>
+              <a:lnSpc>
+                <a:spcPct val="107000"/>
+              </a:lnSpc>
               <a:spcAft>
-                <a:spcPts val="1000"/>
+                <a:spcPts val="1100"/>
               </a:spcAft>
               <a:buChar char="•"/>
             </a:pPr>
             <a:r>
               <a:rPr sz="1500" b="0" i="0">
                 <a:solidFill>
-                  <a:srgbClr val="1F2937"/>
-                </a:solidFill>
+                  <a:srgbClr val="2E3138"/>
+                </a:solidFill>
+                <a:latin typeface="Noto Sans"/>
               </a:rPr>
               <a:t>Penambah lapangan kerja terbesar Feb→Mei 2026: penyediaan akomodasi dan makan minum (+195 ribu), transportasi dan pergudangan (+121 ribu), jasa lainnya (+110 ribu).</a:t>
             </a:r>
           </a:p>
         </p:txBody>
       </p:sp>
+      <p:sp>
+        <p:nvSpPr>
+          <p:cNvPr id="6" name="Rounded Rectangle 5"/>
+          <p:cNvSpPr/>
+          <p:nvPr/>
+        </p:nvSpPr>
+        <p:spPr>
+          <a:xfrm>
+            <a:off x="502920" y="3822191"/>
+            <a:ext cx="6309360" cy="2670048"/>
+          </a:xfrm>
+          <a:prstGeom prst="roundRect">
+            <a:avLst>
+              <a:gd name="adj" fmla="val 5479"/>
+            </a:avLst>
+          </a:prstGeom>
+          <a:solidFill>
+            <a:srgbClr val="F7F1E5"/>
+          </a:solidFill>
+          <a:ln w="12700">
+            <a:solidFill>
+              <a:srgbClr val="DED2BA"/>
+            </a:solidFill>
+          </a:ln>
+          <a:effectLst/>
+        </p:spPr>
+        <p:style>
+          <a:lnRef idx="1">
+            <a:schemeClr val="accent1"/>
+          </a:lnRef>
+          <a:fillRef idx="3">
+            <a:schemeClr val="accent1"/>
+          </a:fillRef>
+          <a:effectRef idx="2">
+            <a:schemeClr val="accent1"/>
+          </a:effectRef>
+          <a:fontRef idx="minor">
+            <a:schemeClr val="lt1"/>
+          </a:fontRef>
+        </p:style>
+        <p:txBody>
+          <a:bodyPr rtlCol="0" anchor="ctr"/>
+          <a:lstStyle/>
+          <a:p>
+            <a:pPr algn="ctr"/>
+          </a:p>
+        </p:txBody>
+      </p:sp>
       <p:pic>
         <p:nvPicPr>
-          <p:cNvPr id="5" name="Picture 4" descr="09_formal_informal.png"/>
+          <p:cNvPr id="7" name="Picture 6" descr="09_formal_informal.png"/>
           <p:cNvPicPr>
             <a:picLocks noChangeAspect="1"/>
           </p:cNvPicPr>
@@ -5305,17 +8373,65 @@
         </p:blipFill>
         <p:spPr>
           <a:xfrm>
-            <a:off x="640080" y="3657600"/>
-            <a:ext cx="5303520" cy="2510944"/>
+            <a:off x="1212567" y="3986783"/>
+            <a:ext cx="4890064" cy="2340864"/>
           </a:xfrm>
           <a:prstGeom prst="rect">
             <a:avLst/>
           </a:prstGeom>
         </p:spPr>
       </p:pic>
+      <p:sp>
+        <p:nvSpPr>
+          <p:cNvPr id="8" name="Rounded Rectangle 7"/>
+          <p:cNvSpPr/>
+          <p:nvPr/>
+        </p:nvSpPr>
+        <p:spPr>
+          <a:xfrm>
+            <a:off x="7040880" y="3822191"/>
+            <a:ext cx="4663440" cy="2670048"/>
+          </a:xfrm>
+          <a:prstGeom prst="roundRect">
+            <a:avLst>
+              <a:gd name="adj" fmla="val 5479"/>
+            </a:avLst>
+          </a:prstGeom>
+          <a:solidFill>
+            <a:srgbClr val="F7F1E5"/>
+          </a:solidFill>
+          <a:ln w="12700">
+            <a:solidFill>
+              <a:srgbClr val="DED2BA"/>
+            </a:solidFill>
+          </a:ln>
+          <a:effectLst/>
+        </p:spPr>
+        <p:style>
+          <a:lnRef idx="1">
+            <a:schemeClr val="accent1"/>
+          </a:lnRef>
+          <a:fillRef idx="3">
+            <a:schemeClr val="accent1"/>
+          </a:fillRef>
+          <a:effectRef idx="2">
+            <a:schemeClr val="accent1"/>
+          </a:effectRef>
+          <a:fontRef idx="minor">
+            <a:schemeClr val="lt1"/>
+          </a:fontRef>
+        </p:style>
+        <p:txBody>
+          <a:bodyPr rtlCol="0" anchor="ctr"/>
+          <a:lstStyle/>
+          <a:p>
+            <a:pPr algn="ctr"/>
+          </a:p>
+        </p:txBody>
+      </p:sp>
       <p:pic>
         <p:nvPicPr>
-          <p:cNvPr id="6" name="Picture 5" descr="10_upah_sektor.png"/>
+          <p:cNvPr id="9" name="Picture 8" descr="10_upah_sektor.png"/>
           <p:cNvPicPr>
             <a:picLocks noChangeAspect="1"/>
           </p:cNvPicPr>
@@ -5329,8 +8445,8 @@
         </p:blipFill>
         <p:spPr>
           <a:xfrm>
-            <a:off x="6217920" y="3657600"/>
-            <a:ext cx="5303520" cy="2204834"/>
+            <a:off x="7205472" y="4256123"/>
+            <a:ext cx="4334255" cy="1802185"/>
           </a:xfrm>
           <a:prstGeom prst="rect">
             <a:avLst/>
